--- a/exports/pptx/lessons/middle-module-10-herbs-aushadhi/day-09-project-session.pptx
+++ b/exports/pptx/lessons/middle-module-10-herbs-aushadhi/day-09-project-session.pptx
@@ -16,9 +16,15 @@
     <p:sldId id="264" r:id="rId10"/>
     <p:sldId id="265" r:id="rId11"/>
     <p:sldId id="266" r:id="rId12"/>
+    <p:sldId id="267" r:id="rId13"/>
+    <p:sldId id="268" r:id="rId14"/>
+    <p:sldId id="269" r:id="rId15"/>
+    <p:sldId id="270" r:id="rId16"/>
+    <p:sldId id="271" r:id="rId17"/>
+    <p:sldId id="272" r:id="rId18"/>
   </p:sldIdLst>
   <p:notesMasterIdLst>
-    <p:notesMasterId r:id="rId13"/>
+    <p:notesMasterId r:id="rId19"/>
   </p:notesMasterIdLst>
   <p:sldSz cx="9144000" cy="5143500"/>
   <p:notesSz cx="5143500" cy="9144000"/>
@@ -712,6 +718,534 @@
             <a:fld id="{F7021451-1387-4CA6-816F-3879F97B5CBC}" type="slidenum">
               <a:rPr lang="en-US"/>
               <a:t>11</a:t>
+            </a:fld>
+            <a:endParaRPr lang="en-US"/>
+          </a:p>
+        </p:txBody>
+      </p:sp>
+    </p:spTree>
+    <p:extLst>
+      <p:ext uri="{BB962C8B-B14F-4D97-AF65-F5344CB8AC3E}">
+        <p14:creationId xmlns:p14="http://schemas.microsoft.com/office/powerpoint/2010/main" val="1024086991"/>
+      </p:ext>
+    </p:extLst>
+  </p:cSld>
+  <p:clrMapOvr>
+    <a:masterClrMapping/>
+  </p:clrMapOvr>
+</p:notes>
+</file>
+
+<file path=ppt/notesSlides/notesSlide12.xml><?xml version="1.0" encoding="utf-8"?>
+<p:notes xmlns:a="http://schemas.openxmlformats.org/drawingml/2006/main" xmlns:r="http://schemas.openxmlformats.org/officeDocument/2006/relationships" xmlns:p="http://schemas.openxmlformats.org/presentationml/2006/main">
+  <p:cSld>
+    <p:spTree>
+      <p:nvGrpSpPr>
+        <p:cNvPr id="1" name=""/>
+        <p:cNvGrpSpPr/>
+        <p:nvPr/>
+      </p:nvGrpSpPr>
+      <p:grpSpPr>
+        <a:xfrm>
+          <a:off x="0" y="0"/>
+          <a:ext cx="0" cy="0"/>
+          <a:chOff x="0" y="0"/>
+          <a:chExt cx="0" cy="0"/>
+        </a:xfrm>
+      </p:grpSpPr>
+      <p:sp>
+        <p:nvSpPr>
+          <p:cNvPr id="2" name="Slide Image Placeholder 1"/>
+          <p:cNvSpPr>
+            <a:spLocks noGrp="1" noRot="1" noChangeAspect="1"/>
+          </p:cNvSpPr>
+          <p:nvPr>
+            <p:ph type="sldImg"/>
+          </p:nvPr>
+        </p:nvSpPr>
+        <p:spPr/>
+      </p:sp>
+      <p:sp>
+        <p:nvSpPr>
+          <p:cNvPr id="3" name="Notes Placeholder 2"/>
+          <p:cNvSpPr>
+            <a:spLocks noGrp="1"/>
+          </p:cNvSpPr>
+          <p:nvPr>
+            <p:ph type="body" idx="1"/>
+          </p:nvPr>
+        </p:nvSpPr>
+        <p:spPr/>
+        <p:txBody>
+          <a:bodyPr/>
+          <a:lstStyle/>
+          <a:p>
+            <a:r>
+              <a:rPr lang="en-US" dirty="0"/>
+              <a:t/>
+            </a:r>
+            <a:endParaRPr lang="en-US" dirty="0"/>
+          </a:p>
+        </p:txBody>
+      </p:sp>
+      <p:sp>
+        <p:nvSpPr>
+          <p:cNvPr id="4" name="Slide Number Placeholder 3"/>
+          <p:cNvSpPr>
+            <a:spLocks noGrp="1"/>
+          </p:cNvSpPr>
+          <p:nvPr>
+            <p:ph type="sldNum" sz="quarter" idx="10"/>
+          </p:nvPr>
+        </p:nvSpPr>
+        <p:spPr/>
+        <p:txBody>
+          <a:bodyPr/>
+          <a:lstStyle/>
+          <a:p>
+            <a:fld id="{F7021451-1387-4CA6-816F-3879F97B5CBC}" type="slidenum">
+              <a:rPr lang="en-US"/>
+              <a:t>12</a:t>
+            </a:fld>
+            <a:endParaRPr lang="en-US"/>
+          </a:p>
+        </p:txBody>
+      </p:sp>
+    </p:spTree>
+    <p:extLst>
+      <p:ext uri="{BB962C8B-B14F-4D97-AF65-F5344CB8AC3E}">
+        <p14:creationId xmlns:p14="http://schemas.microsoft.com/office/powerpoint/2010/main" val="1024086991"/>
+      </p:ext>
+    </p:extLst>
+  </p:cSld>
+  <p:clrMapOvr>
+    <a:masterClrMapping/>
+  </p:clrMapOvr>
+</p:notes>
+</file>
+
+<file path=ppt/notesSlides/notesSlide13.xml><?xml version="1.0" encoding="utf-8"?>
+<p:notes xmlns:a="http://schemas.openxmlformats.org/drawingml/2006/main" xmlns:r="http://schemas.openxmlformats.org/officeDocument/2006/relationships" xmlns:p="http://schemas.openxmlformats.org/presentationml/2006/main">
+  <p:cSld>
+    <p:spTree>
+      <p:nvGrpSpPr>
+        <p:cNvPr id="1" name=""/>
+        <p:cNvGrpSpPr/>
+        <p:nvPr/>
+      </p:nvGrpSpPr>
+      <p:grpSpPr>
+        <a:xfrm>
+          <a:off x="0" y="0"/>
+          <a:ext cx="0" cy="0"/>
+          <a:chOff x="0" y="0"/>
+          <a:chExt cx="0" cy="0"/>
+        </a:xfrm>
+      </p:grpSpPr>
+      <p:sp>
+        <p:nvSpPr>
+          <p:cNvPr id="2" name="Slide Image Placeholder 1"/>
+          <p:cNvSpPr>
+            <a:spLocks noGrp="1" noRot="1" noChangeAspect="1"/>
+          </p:cNvSpPr>
+          <p:nvPr>
+            <p:ph type="sldImg"/>
+          </p:nvPr>
+        </p:nvSpPr>
+        <p:spPr/>
+      </p:sp>
+      <p:sp>
+        <p:nvSpPr>
+          <p:cNvPr id="3" name="Notes Placeholder 2"/>
+          <p:cNvSpPr>
+            <a:spLocks noGrp="1"/>
+          </p:cNvSpPr>
+          <p:nvPr>
+            <p:ph type="body" idx="1"/>
+          </p:nvPr>
+        </p:nvSpPr>
+        <p:spPr/>
+        <p:txBody>
+          <a:bodyPr/>
+          <a:lstStyle/>
+          <a:p>
+            <a:r>
+              <a:rPr lang="en-US" dirty="0"/>
+              <a:t/>
+            </a:r>
+            <a:endParaRPr lang="en-US" dirty="0"/>
+          </a:p>
+        </p:txBody>
+      </p:sp>
+      <p:sp>
+        <p:nvSpPr>
+          <p:cNvPr id="4" name="Slide Number Placeholder 3"/>
+          <p:cNvSpPr>
+            <a:spLocks noGrp="1"/>
+          </p:cNvSpPr>
+          <p:nvPr>
+            <p:ph type="sldNum" sz="quarter" idx="10"/>
+          </p:nvPr>
+        </p:nvSpPr>
+        <p:spPr/>
+        <p:txBody>
+          <a:bodyPr/>
+          <a:lstStyle/>
+          <a:p>
+            <a:fld id="{F7021451-1387-4CA6-816F-3879F97B5CBC}" type="slidenum">
+              <a:rPr lang="en-US"/>
+              <a:t>13</a:t>
+            </a:fld>
+            <a:endParaRPr lang="en-US"/>
+          </a:p>
+        </p:txBody>
+      </p:sp>
+    </p:spTree>
+    <p:extLst>
+      <p:ext uri="{BB962C8B-B14F-4D97-AF65-F5344CB8AC3E}">
+        <p14:creationId xmlns:p14="http://schemas.microsoft.com/office/powerpoint/2010/main" val="1024086991"/>
+      </p:ext>
+    </p:extLst>
+  </p:cSld>
+  <p:clrMapOvr>
+    <a:masterClrMapping/>
+  </p:clrMapOvr>
+</p:notes>
+</file>
+
+<file path=ppt/notesSlides/notesSlide14.xml><?xml version="1.0" encoding="utf-8"?>
+<p:notes xmlns:a="http://schemas.openxmlformats.org/drawingml/2006/main" xmlns:r="http://schemas.openxmlformats.org/officeDocument/2006/relationships" xmlns:p="http://schemas.openxmlformats.org/presentationml/2006/main">
+  <p:cSld>
+    <p:spTree>
+      <p:nvGrpSpPr>
+        <p:cNvPr id="1" name=""/>
+        <p:cNvGrpSpPr/>
+        <p:nvPr/>
+      </p:nvGrpSpPr>
+      <p:grpSpPr>
+        <a:xfrm>
+          <a:off x="0" y="0"/>
+          <a:ext cx="0" cy="0"/>
+          <a:chOff x="0" y="0"/>
+          <a:chExt cx="0" cy="0"/>
+        </a:xfrm>
+      </p:grpSpPr>
+      <p:sp>
+        <p:nvSpPr>
+          <p:cNvPr id="2" name="Slide Image Placeholder 1"/>
+          <p:cNvSpPr>
+            <a:spLocks noGrp="1" noRot="1" noChangeAspect="1"/>
+          </p:cNvSpPr>
+          <p:nvPr>
+            <p:ph type="sldImg"/>
+          </p:nvPr>
+        </p:nvSpPr>
+        <p:spPr/>
+      </p:sp>
+      <p:sp>
+        <p:nvSpPr>
+          <p:cNvPr id="3" name="Notes Placeholder 2"/>
+          <p:cNvSpPr>
+            <a:spLocks noGrp="1"/>
+          </p:cNvSpPr>
+          <p:nvPr>
+            <p:ph type="body" idx="1"/>
+          </p:nvPr>
+        </p:nvSpPr>
+        <p:spPr/>
+        <p:txBody>
+          <a:bodyPr/>
+          <a:lstStyle/>
+          <a:p>
+            <a:r>
+              <a:rPr lang="en-US" dirty="0"/>
+              <a:t/>
+            </a:r>
+            <a:endParaRPr lang="en-US" dirty="0"/>
+          </a:p>
+        </p:txBody>
+      </p:sp>
+      <p:sp>
+        <p:nvSpPr>
+          <p:cNvPr id="4" name="Slide Number Placeholder 3"/>
+          <p:cNvSpPr>
+            <a:spLocks noGrp="1"/>
+          </p:cNvSpPr>
+          <p:nvPr>
+            <p:ph type="sldNum" sz="quarter" idx="10"/>
+          </p:nvPr>
+        </p:nvSpPr>
+        <p:spPr/>
+        <p:txBody>
+          <a:bodyPr/>
+          <a:lstStyle/>
+          <a:p>
+            <a:fld id="{F7021451-1387-4CA6-816F-3879F97B5CBC}" type="slidenum">
+              <a:rPr lang="en-US"/>
+              <a:t>14</a:t>
+            </a:fld>
+            <a:endParaRPr lang="en-US"/>
+          </a:p>
+        </p:txBody>
+      </p:sp>
+    </p:spTree>
+    <p:extLst>
+      <p:ext uri="{BB962C8B-B14F-4D97-AF65-F5344CB8AC3E}">
+        <p14:creationId xmlns:p14="http://schemas.microsoft.com/office/powerpoint/2010/main" val="1024086991"/>
+      </p:ext>
+    </p:extLst>
+  </p:cSld>
+  <p:clrMapOvr>
+    <a:masterClrMapping/>
+  </p:clrMapOvr>
+</p:notes>
+</file>
+
+<file path=ppt/notesSlides/notesSlide15.xml><?xml version="1.0" encoding="utf-8"?>
+<p:notes xmlns:a="http://schemas.openxmlformats.org/drawingml/2006/main" xmlns:r="http://schemas.openxmlformats.org/officeDocument/2006/relationships" xmlns:p="http://schemas.openxmlformats.org/presentationml/2006/main">
+  <p:cSld>
+    <p:spTree>
+      <p:nvGrpSpPr>
+        <p:cNvPr id="1" name=""/>
+        <p:cNvGrpSpPr/>
+        <p:nvPr/>
+      </p:nvGrpSpPr>
+      <p:grpSpPr>
+        <a:xfrm>
+          <a:off x="0" y="0"/>
+          <a:ext cx="0" cy="0"/>
+          <a:chOff x="0" y="0"/>
+          <a:chExt cx="0" cy="0"/>
+        </a:xfrm>
+      </p:grpSpPr>
+      <p:sp>
+        <p:nvSpPr>
+          <p:cNvPr id="2" name="Slide Image Placeholder 1"/>
+          <p:cNvSpPr>
+            <a:spLocks noGrp="1" noRot="1" noChangeAspect="1"/>
+          </p:cNvSpPr>
+          <p:nvPr>
+            <p:ph type="sldImg"/>
+          </p:nvPr>
+        </p:nvSpPr>
+        <p:spPr/>
+      </p:sp>
+      <p:sp>
+        <p:nvSpPr>
+          <p:cNvPr id="3" name="Notes Placeholder 2"/>
+          <p:cNvSpPr>
+            <a:spLocks noGrp="1"/>
+          </p:cNvSpPr>
+          <p:nvPr>
+            <p:ph type="body" idx="1"/>
+          </p:nvPr>
+        </p:nvSpPr>
+        <p:spPr/>
+        <p:txBody>
+          <a:bodyPr/>
+          <a:lstStyle/>
+          <a:p>
+            <a:r>
+              <a:rPr lang="en-US" dirty="0"/>
+              <a:t/>
+            </a:r>
+            <a:endParaRPr lang="en-US" dirty="0"/>
+          </a:p>
+        </p:txBody>
+      </p:sp>
+      <p:sp>
+        <p:nvSpPr>
+          <p:cNvPr id="4" name="Slide Number Placeholder 3"/>
+          <p:cNvSpPr>
+            <a:spLocks noGrp="1"/>
+          </p:cNvSpPr>
+          <p:nvPr>
+            <p:ph type="sldNum" sz="quarter" idx="10"/>
+          </p:nvPr>
+        </p:nvSpPr>
+        <p:spPr/>
+        <p:txBody>
+          <a:bodyPr/>
+          <a:lstStyle/>
+          <a:p>
+            <a:fld id="{F7021451-1387-4CA6-816F-3879F97B5CBC}" type="slidenum">
+              <a:rPr lang="en-US"/>
+              <a:t>15</a:t>
+            </a:fld>
+            <a:endParaRPr lang="en-US"/>
+          </a:p>
+        </p:txBody>
+      </p:sp>
+    </p:spTree>
+    <p:extLst>
+      <p:ext uri="{BB962C8B-B14F-4D97-AF65-F5344CB8AC3E}">
+        <p14:creationId xmlns:p14="http://schemas.microsoft.com/office/powerpoint/2010/main" val="1024086991"/>
+      </p:ext>
+    </p:extLst>
+  </p:cSld>
+  <p:clrMapOvr>
+    <a:masterClrMapping/>
+  </p:clrMapOvr>
+</p:notes>
+</file>
+
+<file path=ppt/notesSlides/notesSlide16.xml><?xml version="1.0" encoding="utf-8"?>
+<p:notes xmlns:a="http://schemas.openxmlformats.org/drawingml/2006/main" xmlns:r="http://schemas.openxmlformats.org/officeDocument/2006/relationships" xmlns:p="http://schemas.openxmlformats.org/presentationml/2006/main">
+  <p:cSld>
+    <p:spTree>
+      <p:nvGrpSpPr>
+        <p:cNvPr id="1" name=""/>
+        <p:cNvGrpSpPr/>
+        <p:nvPr/>
+      </p:nvGrpSpPr>
+      <p:grpSpPr>
+        <a:xfrm>
+          <a:off x="0" y="0"/>
+          <a:ext cx="0" cy="0"/>
+          <a:chOff x="0" y="0"/>
+          <a:chExt cx="0" cy="0"/>
+        </a:xfrm>
+      </p:grpSpPr>
+      <p:sp>
+        <p:nvSpPr>
+          <p:cNvPr id="2" name="Slide Image Placeholder 1"/>
+          <p:cNvSpPr>
+            <a:spLocks noGrp="1" noRot="1" noChangeAspect="1"/>
+          </p:cNvSpPr>
+          <p:nvPr>
+            <p:ph type="sldImg"/>
+          </p:nvPr>
+        </p:nvSpPr>
+        <p:spPr/>
+      </p:sp>
+      <p:sp>
+        <p:nvSpPr>
+          <p:cNvPr id="3" name="Notes Placeholder 2"/>
+          <p:cNvSpPr>
+            <a:spLocks noGrp="1"/>
+          </p:cNvSpPr>
+          <p:nvPr>
+            <p:ph type="body" idx="1"/>
+          </p:nvPr>
+        </p:nvSpPr>
+        <p:spPr/>
+        <p:txBody>
+          <a:bodyPr/>
+          <a:lstStyle/>
+          <a:p>
+            <a:r>
+              <a:rPr lang="en-US" dirty="0"/>
+              <a:t/>
+            </a:r>
+            <a:endParaRPr lang="en-US" dirty="0"/>
+          </a:p>
+        </p:txBody>
+      </p:sp>
+      <p:sp>
+        <p:nvSpPr>
+          <p:cNvPr id="4" name="Slide Number Placeholder 3"/>
+          <p:cNvSpPr>
+            <a:spLocks noGrp="1"/>
+          </p:cNvSpPr>
+          <p:nvPr>
+            <p:ph type="sldNum" sz="quarter" idx="10"/>
+          </p:nvPr>
+        </p:nvSpPr>
+        <p:spPr/>
+        <p:txBody>
+          <a:bodyPr/>
+          <a:lstStyle/>
+          <a:p>
+            <a:fld id="{F7021451-1387-4CA6-816F-3879F97B5CBC}" type="slidenum">
+              <a:rPr lang="en-US"/>
+              <a:t>16</a:t>
+            </a:fld>
+            <a:endParaRPr lang="en-US"/>
+          </a:p>
+        </p:txBody>
+      </p:sp>
+    </p:spTree>
+    <p:extLst>
+      <p:ext uri="{BB962C8B-B14F-4D97-AF65-F5344CB8AC3E}">
+        <p14:creationId xmlns:p14="http://schemas.microsoft.com/office/powerpoint/2010/main" val="1024086991"/>
+      </p:ext>
+    </p:extLst>
+  </p:cSld>
+  <p:clrMapOvr>
+    <a:masterClrMapping/>
+  </p:clrMapOvr>
+</p:notes>
+</file>
+
+<file path=ppt/notesSlides/notesSlide17.xml><?xml version="1.0" encoding="utf-8"?>
+<p:notes xmlns:a="http://schemas.openxmlformats.org/drawingml/2006/main" xmlns:r="http://schemas.openxmlformats.org/officeDocument/2006/relationships" xmlns:p="http://schemas.openxmlformats.org/presentationml/2006/main">
+  <p:cSld>
+    <p:spTree>
+      <p:nvGrpSpPr>
+        <p:cNvPr id="1" name=""/>
+        <p:cNvGrpSpPr/>
+        <p:nvPr/>
+      </p:nvGrpSpPr>
+      <p:grpSpPr>
+        <a:xfrm>
+          <a:off x="0" y="0"/>
+          <a:ext cx="0" cy="0"/>
+          <a:chOff x="0" y="0"/>
+          <a:chExt cx="0" cy="0"/>
+        </a:xfrm>
+      </p:grpSpPr>
+      <p:sp>
+        <p:nvSpPr>
+          <p:cNvPr id="2" name="Slide Image Placeholder 1"/>
+          <p:cNvSpPr>
+            <a:spLocks noGrp="1" noRot="1" noChangeAspect="1"/>
+          </p:cNvSpPr>
+          <p:nvPr>
+            <p:ph type="sldImg"/>
+          </p:nvPr>
+        </p:nvSpPr>
+        <p:spPr/>
+      </p:sp>
+      <p:sp>
+        <p:nvSpPr>
+          <p:cNvPr id="3" name="Notes Placeholder 2"/>
+          <p:cNvSpPr>
+            <a:spLocks noGrp="1"/>
+          </p:cNvSpPr>
+          <p:nvPr>
+            <p:ph type="body" idx="1"/>
+          </p:nvPr>
+        </p:nvSpPr>
+        <p:spPr/>
+        <p:txBody>
+          <a:bodyPr/>
+          <a:lstStyle/>
+          <a:p>
+            <a:r>
+              <a:rPr lang="en-US" dirty="0"/>
+              <a:t/>
+            </a:r>
+            <a:endParaRPr lang="en-US" dirty="0"/>
+          </a:p>
+        </p:txBody>
+      </p:sp>
+      <p:sp>
+        <p:nvSpPr>
+          <p:cNvPr id="4" name="Slide Number Placeholder 3"/>
+          <p:cNvSpPr>
+            <a:spLocks noGrp="1"/>
+          </p:cNvSpPr>
+          <p:nvPr>
+            <p:ph type="sldNum" sz="quarter" idx="10"/>
+          </p:nvPr>
+        </p:nvSpPr>
+        <p:spPr/>
+        <p:txBody>
+          <a:bodyPr/>
+          <a:lstStyle/>
+          <a:p>
+            <a:fld id="{F7021451-1387-4CA6-816F-3879F97B5CBC}" type="slidenum">
+              <a:rPr lang="en-US"/>
+              <a:t>17</a:t>
             </a:fld>
             <a:endParaRPr lang="en-US"/>
           </a:p>
@@ -2011,148 +2545,6 @@
         </p:nvSpPr>
         <p:spPr>
           <a:xfrm>
-            <a:off x="406301" y="1223963"/>
-            <a:ext cx="8498026" cy="274290"/>
-          </a:xfrm>
-          <a:prstGeom prst="rect">
-            <a:avLst/>
-          </a:prstGeom>
-          <a:noFill/>
-          <a:ln/>
-        </p:spPr>
-        <p:txBody>
-          <a:bodyPr wrap="square" lIns="0" tIns="0" rIns="0" bIns="0" rtlCol="0" anchor="t"/>
-          <a:lstStyle/>
-          <a:p>
-            <a:pPr algn="l" indent="0" marL="0">
-              <a:lnSpc>
-                <a:spcPts val="2160"/>
-              </a:lnSpc>
-              <a:spcBef>
-                <a:spcPts val="600"/>
-              </a:spcBef>
-              <a:spcAft>
-                <a:spcPts val="800"/>
-              </a:spcAft>
-              <a:buNone/>
-            </a:pPr>
-            <a:r>
-              <a:rPr lang="en-US" sz="1800" b="1" dirty="0">
-                <a:solidFill>
-                  <a:srgbClr val="FE4447"/>
-                </a:solidFill>
-                <a:latin typeface="Georgia" pitchFamily="34" charset="0"/>
-                <a:ea typeface="Georgia" pitchFamily="34" charset="-122"/>
-                <a:cs typeface="Georgia" pitchFamily="34" charset="-120"/>
-              </a:rPr>
-              <a:t>Learning objective</a:t>
-            </a:r>
-            <a:endParaRPr lang="en-US" sz="1800" dirty="0"/>
-          </a:p>
-        </p:txBody>
-      </p:sp>
-      <p:sp>
-        <p:nvSpPr>
-          <p:cNvPr id="6" name="Text 4"/>
-          <p:cNvSpPr/>
-          <p:nvPr/>
-        </p:nvSpPr>
-        <p:spPr>
-          <a:xfrm>
-            <a:off x="406301" y="1637854"/>
-            <a:ext cx="8498026" cy="426541"/>
-          </a:xfrm>
-          <a:prstGeom prst="rect">
-            <a:avLst/>
-          </a:prstGeom>
-          <a:noFill/>
-          <a:ln/>
-        </p:spPr>
-        <p:txBody>
-          <a:bodyPr wrap="square" lIns="0" tIns="0" rIns="0" bIns="0" rtlCol="0" anchor="t"/>
-          <a:lstStyle/>
-          <a:p>
-            <a:pPr algn="l" indent="0" marL="0">
-              <a:lnSpc>
-                <a:spcPts val="1680"/>
-              </a:lnSpc>
-              <a:spcBef>
-                <a:spcPts val="300"/>
-              </a:spcBef>
-              <a:spcAft>
-                <a:spcPts val="300"/>
-              </a:spcAft>
-              <a:buNone/>
-            </a:pPr>
-            <a:r>
-              <a:rPr lang="en-US" sz="1200" dirty="0">
-                <a:solidFill>
-                  <a:srgbClr val="1C2833"/>
-                </a:solidFill>
-                <a:latin typeface="Arial" pitchFamily="34" charset="0"/>
-                <a:ea typeface="Arial" pitchFamily="34" charset="-122"/>
-                <a:cs typeface="Arial" pitchFamily="34" charset="-120"/>
-              </a:rPr>
-              <a:t>By the end of this lesson, each pair has produced </a:t>
-            </a:r>
-            <a:pPr algn="l" indent="0" marL="0">
-              <a:lnSpc>
-                <a:spcPts val="1680"/>
-              </a:lnSpc>
-              <a:spcBef>
-                <a:spcPts val="300"/>
-              </a:spcBef>
-              <a:spcAft>
-                <a:spcPts val="300"/>
-              </a:spcAft>
-              <a:buNone/>
-            </a:pPr>
-            <a:r>
-              <a:rPr lang="en-US" sz="1200" b="1" dirty="0">
-                <a:solidFill>
-                  <a:srgbClr val="1C2833"/>
-                </a:solidFill>
-                <a:latin typeface="Arial" pitchFamily="34" charset="0"/>
-                <a:ea typeface="Arial" pitchFamily="34" charset="-122"/>
-                <a:cs typeface="Arial" pitchFamily="34" charset="-120"/>
-              </a:rPr>
-              <a:t>all six cards</a:t>
-            </a:r>
-            <a:pPr algn="l" indent="0" marL="0">
-              <a:lnSpc>
-                <a:spcPts val="1680"/>
-              </a:lnSpc>
-              <a:spcBef>
-                <a:spcPts val="300"/>
-              </a:spcBef>
-              <a:spcAft>
-                <a:spcPts val="300"/>
-              </a:spcAft>
-              <a:buNone/>
-            </a:pPr>
-            <a:r>
-              <a:rPr lang="en-US" sz="1200" dirty="0">
-                <a:solidFill>
-                  <a:srgbClr val="1C2833"/>
-                </a:solidFill>
-                <a:latin typeface="Arial" pitchFamily="34" charset="0"/>
-                <a:ea typeface="Arial" pitchFamily="34" charset="-122"/>
-                <a:cs typeface="Arial" pitchFamily="34" charset="-120"/>
-              </a:rPr>
-              <a:t> in draft form, each containing the eight required elements (see below). The cards are ready for finalising at home and presenting on Day 10.</a:t>
-            </a:r>
-            <a:endParaRPr lang="en-US" sz="1200" dirty="0"/>
-          </a:p>
-        </p:txBody>
-      </p:sp>
-      <p:sp>
-        <p:nvSpPr>
-          <p:cNvPr id="7" name="Text 5"/>
-          <p:cNvSpPr/>
-          <p:nvPr/>
-        </p:nvSpPr>
-        <p:spPr>
-          <a:xfrm>
             <a:off x="406301" y="4434929"/>
             <a:ext cx="8498026" cy="213271"/>
           </a:xfrm>
@@ -2297,7 +2689,7 @@
                 <a:ea typeface="Georgia" pitchFamily="34" charset="-122"/>
                 <a:cs typeface="Georgia" pitchFamily="34" charset="-120"/>
               </a:rPr>
-              <a:t>Teacher notes</a:t>
+              <a:t>Core / activity (35 min) (cont.)</a:t>
             </a:r>
             <a:endParaRPr lang="en-US" sz="1800" dirty="0"/>
           </a:p>
@@ -2312,7 +2704,7 @@
         <p:spPr>
           <a:xfrm>
             <a:off x="406301" y="870942"/>
-            <a:ext cx="8498026" cy="853083"/>
+            <a:ext cx="8498026" cy="213271"/>
           </a:xfrm>
           <a:prstGeom prst="rect">
             <a:avLst/>
@@ -2345,7 +2737,7 @@
                 <a:ea typeface="Arial" pitchFamily="34" charset="-122"/>
                 <a:cs typeface="Arial" pitchFamily="34" charset="-120"/>
               </a:rPr>
-              <a:t>– This is a build session, not a teaching session. Resist the urge to lecture. Walk around. Ask questions. Point at gaps. – Common failure mode: pairs spend the first 15 min discussing what to draw and end up with one half-card. Set the timer visible. Push pace. – Common failure mode: one partner draws while the other watches. Reassign — partner A does 3 cards in pen, partner B does 3 cards in pen, then they swap and refine each other's.</a:t>
+              <a:t>If a pair lags at any checkpoint, intervene specifically — don't let them spend 15 minutes perfecting one card.</a:t>
             </a:r>
             <a:endParaRPr lang="en-US" sz="1200" dirty="0"/>
           </a:p>
@@ -2503,7 +2895,7 @@
                 <a:ea typeface="Georgia" pitchFamily="34" charset="-122"/>
                 <a:cs typeface="Georgia" pitchFamily="34" charset="-120"/>
               </a:rPr>
-              <a:t>Citation(s) used in this lesson</a:t>
+              <a:t>Core / activity (35 min) (cont.)</a:t>
             </a:r>
             <a:endParaRPr lang="en-US" sz="1800" dirty="0"/>
           </a:p>
@@ -2518,7 +2910,7 @@
         <p:spPr>
           <a:xfrm>
             <a:off x="406301" y="870942"/>
-            <a:ext cx="8498026" cy="222796"/>
+            <a:ext cx="8498026" cy="213271"/>
           </a:xfrm>
           <a:prstGeom prst="rect">
             <a:avLst/>
@@ -2543,6 +2935,52 @@
               <a:buNone/>
             </a:pPr>
             <a:r>
+              <a:rPr lang="en-US" sz="1200" b="1" dirty="0">
+                <a:solidFill>
+                  <a:srgbClr val="1C2833"/>
+                </a:solidFill>
+                <a:latin typeface="Arial" pitchFamily="34" charset="0"/>
+                <a:ea typeface="Arial" pitchFamily="34" charset="-122"/>
+                <a:cs typeface="Arial" pitchFamily="34" charset="-120"/>
+              </a:rPr>
+              <a:t>Quality interventions to watch for:</a:t>
+            </a:r>
+            <a:endParaRPr lang="en-US" sz="1200" dirty="0"/>
+          </a:p>
+        </p:txBody>
+      </p:sp>
+      <p:sp>
+        <p:nvSpPr>
+          <p:cNvPr id="5" name="Text 3"/>
+          <p:cNvSpPr/>
+          <p:nvPr/>
+        </p:nvSpPr>
+        <p:spPr>
+          <a:xfrm>
+            <a:off x="634901" y="1173063"/>
+            <a:ext cx="8102798" cy="1424583"/>
+          </a:xfrm>
+          <a:prstGeom prst="rect">
+            <a:avLst/>
+          </a:prstGeom>
+          <a:noFill/>
+          <a:ln/>
+        </p:spPr>
+        <p:txBody>
+          <a:bodyPr wrap="square" lIns="0" tIns="0" rIns="0" bIns="0" rtlCol="0" anchor="t"/>
+          <a:lstStyle/>
+          <a:p>
+            <a:pPr algn="l" marL="342900" indent="-342900">
+              <a:lnSpc>
+                <a:spcPts val="1620"/>
+              </a:lnSpc>
+              <a:spcAft>
+                <a:spcPts val="300"/>
+              </a:spcAft>
+              <a:buSzPct val="100000"/>
+              <a:buChar char="•"/>
+            </a:pPr>
+            <a:r>
               <a:rPr lang="en-US" sz="1200" dirty="0">
                 <a:solidFill>
                   <a:srgbClr val="1C2833"/>
@@ -2551,8 +2989,105 @@
                 <a:ea typeface="Arial" pitchFamily="34" charset="-122"/>
                 <a:cs typeface="Arial" pitchFamily="34" charset="-120"/>
               </a:rPr>
-              <a:t>– Project brief — </a:t>
-            </a:r>
+              <a:t>Cards copying directly from a worksheet without engagement → ask "what's the most interesting thing about this herb? Add that to the card."</a:t>
+            </a:r>
+            <a:endParaRPr lang="en-US" sz="1200" dirty="0"/>
+          </a:p>
+          <a:p>
+            <a:pPr algn="l" marL="342900" indent="-342900">
+              <a:lnSpc>
+                <a:spcPts val="1620"/>
+              </a:lnSpc>
+              <a:spcAft>
+                <a:spcPts val="300"/>
+              </a:spcAft>
+              <a:buSzPct val="100000"/>
+              <a:buChar char="•"/>
+            </a:pPr>
+            <a:r>
+              <a:rPr lang="en-US" sz="1200" dirty="0">
+                <a:solidFill>
+                  <a:srgbClr val="1C2833"/>
+                </a:solidFill>
+                <a:latin typeface="Arial" pitchFamily="34" charset="0"/>
+                <a:ea typeface="Arial" pitchFamily="34" charset="-122"/>
+                <a:cs typeface="Arial" pitchFamily="34" charset="-120"/>
+              </a:rPr>
+              <a:t>Cards with no safety note → "what's the dose question for this herb?" Write the answer.</a:t>
+            </a:r>
+            <a:endParaRPr lang="en-US" sz="1200" dirty="0"/>
+          </a:p>
+          <a:p>
+            <a:pPr algn="l" marL="342900" indent="-342900">
+              <a:lnSpc>
+                <a:spcPts val="1620"/>
+              </a:lnSpc>
+              <a:spcAft>
+                <a:spcPts val="300"/>
+              </a:spcAft>
+              <a:buSzPct val="100000"/>
+              <a:buChar char="•"/>
+            </a:pPr>
+            <a:r>
+              <a:rPr lang="en-US" sz="1200" dirty="0">
+                <a:solidFill>
+                  <a:srgbClr val="1C2833"/>
+                </a:solidFill>
+                <a:latin typeface="Arial" pitchFamily="34" charset="0"/>
+                <a:ea typeface="Arial" pitchFamily="34" charset="-122"/>
+                <a:cs typeface="Arial" pitchFamily="34" charset="-120"/>
+              </a:rPr>
+              <a:t>Cards with grand health claims ("turmeric cures arthritis") → push back: "what does the evidence actually say?"</a:t>
+            </a:r>
+            <a:endParaRPr lang="en-US" sz="1200" dirty="0"/>
+          </a:p>
+          <a:p>
+            <a:pPr algn="l" marL="342900" indent="-342900">
+              <a:lnSpc>
+                <a:spcPts val="1620"/>
+              </a:lnSpc>
+              <a:spcAft>
+                <a:spcPts val="300"/>
+              </a:spcAft>
+              <a:buSzPct val="100000"/>
+              <a:buChar char="•"/>
+            </a:pPr>
+            <a:r>
+              <a:rPr lang="en-US" sz="1200" dirty="0">
+                <a:solidFill>
+                  <a:srgbClr val="1C2833"/>
+                </a:solidFill>
+                <a:latin typeface="Arial" pitchFamily="34" charset="0"/>
+                <a:ea typeface="Arial" pitchFamily="34" charset="-122"/>
+                <a:cs typeface="Arial" pitchFamily="34" charset="-120"/>
+              </a:rPr>
+              <a:t>Cards missing the family → look it up together on the board (Lamiaceae for tulsi+mint, Apiaceae for ajwain, Zingiberaceae for ginger+turmeric, Meliaceae for neem).</a:t>
+            </a:r>
+            <a:endParaRPr lang="en-US" sz="1200" dirty="0"/>
+          </a:p>
+        </p:txBody>
+      </p:sp>
+      <p:sp>
+        <p:nvSpPr>
+          <p:cNvPr id="6" name="Text 4"/>
+          <p:cNvSpPr/>
+          <p:nvPr/>
+        </p:nvSpPr>
+        <p:spPr>
+          <a:xfrm>
+            <a:off x="406301" y="4434929"/>
+            <a:ext cx="8498026" cy="213271"/>
+          </a:xfrm>
+          <a:prstGeom prst="rect">
+            <a:avLst/>
+          </a:prstGeom>
+          <a:noFill/>
+          <a:ln/>
+        </p:spPr>
+        <p:txBody>
+          <a:bodyPr wrap="square" lIns="0" tIns="0" rIns="0" bIns="0" rtlCol="0" anchor="t"/>
+          <a:lstStyle/>
+          <a:p>
             <a:pPr algn="l" indent="0" marL="0">
               <a:lnSpc>
                 <a:spcPts val="1680"/>
@@ -2574,19 +3109,1964 @@
                 <a:ea typeface="Arial" pitchFamily="34" charset="-122"/>
                 <a:cs typeface="Arial" pitchFamily="34" charset="-120"/>
               </a:rPr>
+              <a:t>Middle ·  · IKS Curriculum</a:t>
+            </a:r>
+            <a:endParaRPr lang="en-US" sz="1200" dirty="0"/>
+          </a:p>
+        </p:txBody>
+      </p:sp>
+    </p:spTree>
+  </p:cSld>
+  <p:clrMapOvr>
+    <a:masterClrMapping/>
+  </p:clrMapOvr>
+</p:sld>
+</file>
+
+<file path=ppt/slides/slide12.xml><?xml version="1.0" encoding="utf-8"?>
+<p:sld xmlns:a="http://schemas.openxmlformats.org/drawingml/2006/main" xmlns:r="http://schemas.openxmlformats.org/officeDocument/2006/relationships" xmlns:p="http://schemas.openxmlformats.org/presentationml/2006/main">
+  <p:cSld name="Slide 12">
+    <p:bg>
+      <p:bgPr>
+        <a:solidFill>
+          <a:srgbClr val="FFFFFF"/>
+        </a:solidFill>
+      </p:bgPr>
+    </p:bg>
+    <p:spTree>
+      <p:nvGrpSpPr>
+        <p:cNvPr id="1" name=""/>
+        <p:cNvGrpSpPr/>
+        <p:nvPr/>
+      </p:nvGrpSpPr>
+      <p:grpSpPr>
+        <a:xfrm>
+          <a:off x="0" y="0"/>
+          <a:ext cx="0" cy="0"/>
+          <a:chOff x="0" y="0"/>
+          <a:chExt cx="0" cy="0"/>
+        </a:xfrm>
+      </p:grpSpPr>
+      <p:sp>
+        <p:nvSpPr>
+          <p:cNvPr id="2" name="Text 0"/>
+          <p:cNvSpPr/>
+          <p:nvPr/>
+        </p:nvSpPr>
+        <p:spPr>
+          <a:xfrm>
+            <a:off x="0" y="0"/>
+            <a:ext cx="9144000" cy="101501"/>
+          </a:xfrm>
+          <a:prstGeom prst="rect">
+            <a:avLst/>
+          </a:prstGeom>
+          <a:solidFill>
+            <a:srgbClr val="277884"/>
+          </a:solidFill>
+          <a:ln/>
+        </p:spPr>
+        <p:txBody>
+          <a:bodyPr wrap="square" rtlCol="0" anchor="ctr"/>
+          <a:lstStyle/>
+          <a:p>
+            <a:pPr indent="0" marL="0">
+              <a:buNone/>
+            </a:pPr>
+            <a:endParaRPr lang="en-US" dirty="0"/>
+          </a:p>
+        </p:txBody>
+      </p:sp>
+      <p:sp>
+        <p:nvSpPr>
+          <p:cNvPr id="3" name="Text 1"/>
+          <p:cNvSpPr/>
+          <p:nvPr/>
+        </p:nvSpPr>
+        <p:spPr>
+          <a:xfrm>
+            <a:off x="406301" y="457051"/>
+            <a:ext cx="8498026" cy="274290"/>
+          </a:xfrm>
+          <a:prstGeom prst="rect">
+            <a:avLst/>
+          </a:prstGeom>
+          <a:noFill/>
+          <a:ln/>
+        </p:spPr>
+        <p:txBody>
+          <a:bodyPr wrap="square" lIns="0" tIns="0" rIns="0" bIns="0" rtlCol="0" anchor="t"/>
+          <a:lstStyle/>
+          <a:p>
+            <a:pPr algn="l" indent="0" marL="0">
+              <a:lnSpc>
+                <a:spcPts val="2160"/>
+              </a:lnSpc>
+              <a:spcBef>
+                <a:spcPts val="600"/>
+              </a:spcBef>
+              <a:spcAft>
+                <a:spcPts val="800"/>
+              </a:spcAft>
+              <a:buNone/>
+            </a:pPr>
+            <a:r>
+              <a:rPr lang="en-US" sz="1800" b="1" dirty="0">
+                <a:solidFill>
+                  <a:srgbClr val="FE4447"/>
+                </a:solidFill>
+                <a:latin typeface="Georgia" pitchFamily="34" charset="0"/>
+                <a:ea typeface="Georgia" pitchFamily="34" charset="-122"/>
+                <a:cs typeface="Georgia" pitchFamily="34" charset="-120"/>
+              </a:rPr>
+              <a:t>Wrap-up (5 min)</a:t>
+            </a:r>
+            <a:endParaRPr lang="en-US" sz="1800" dirty="0"/>
+          </a:p>
+        </p:txBody>
+      </p:sp>
+      <p:sp>
+        <p:nvSpPr>
+          <p:cNvPr id="4" name="Text 2"/>
+          <p:cNvSpPr/>
+          <p:nvPr/>
+        </p:nvSpPr>
+        <p:spPr>
+          <a:xfrm>
+            <a:off x="634901" y="883593"/>
+            <a:ext cx="8102798" cy="769441"/>
+          </a:xfrm>
+          <a:prstGeom prst="rect">
+            <a:avLst/>
+          </a:prstGeom>
+          <a:noFill/>
+          <a:ln/>
+        </p:spPr>
+        <p:txBody>
+          <a:bodyPr wrap="square" lIns="0" tIns="0" rIns="0" bIns="0" rtlCol="0" anchor="t"/>
+          <a:lstStyle/>
+          <a:p>
+            <a:pPr algn="l" marL="342900" indent="-342900">
+              <a:lnSpc>
+                <a:spcPts val="1620"/>
+              </a:lnSpc>
+              <a:spcAft>
+                <a:spcPts val="300"/>
+              </a:spcAft>
+              <a:buSzPct val="100000"/>
+              <a:buChar char="•"/>
+            </a:pPr>
+            <a:r>
+              <a:rPr lang="en-US" sz="1200" dirty="0">
+                <a:solidFill>
+                  <a:srgbClr val="1C2833"/>
+                </a:solidFill>
+                <a:latin typeface="Arial" pitchFamily="34" charset="0"/>
+                <a:ea typeface="Arial" pitchFamily="34" charset="-122"/>
+                <a:cs typeface="Arial" pitchFamily="34" charset="-120"/>
+              </a:rPr>
+              <a:t>Each pair holds up one card they're proudest of. 10-second show + tell.</a:t>
+            </a:r>
+            <a:endParaRPr lang="en-US" sz="1200" dirty="0"/>
+          </a:p>
+          <a:p>
+            <a:pPr algn="l" marL="342900" indent="-342900">
+              <a:lnSpc>
+                <a:spcPts val="1620"/>
+              </a:lnSpc>
+              <a:spcAft>
+                <a:spcPts val="300"/>
+              </a:spcAft>
+              <a:buSzPct val="100000"/>
+              <a:buChar char="•"/>
+            </a:pPr>
+            <a:r>
+              <a:rPr lang="en-US" sz="1200" dirty="0">
+                <a:solidFill>
+                  <a:srgbClr val="1C2833"/>
+                </a:solidFill>
+                <a:latin typeface="Arial" pitchFamily="34" charset="0"/>
+                <a:ea typeface="Arial" pitchFamily="34" charset="-122"/>
+                <a:cs typeface="Arial" pitchFamily="34" charset="-120"/>
+              </a:rPr>
+              <a:t>Collect cards in pair-folders for tomorrow. (Or have pairs take them home if they prefer to finalise overnight.)</a:t>
+            </a:r>
+            <a:endParaRPr lang="en-US" sz="1200" dirty="0"/>
+          </a:p>
+          <a:p>
+            <a:pPr algn="l" marL="342900" indent="-342900">
+              <a:lnSpc>
+                <a:spcPts val="1620"/>
+              </a:lnSpc>
+              <a:spcAft>
+                <a:spcPts val="300"/>
+              </a:spcAft>
+              <a:buSzPct val="100000"/>
+              <a:buChar char="•"/>
+            </a:pPr>
+            <a:r>
+              <a:rPr lang="en-US" sz="1200" dirty="0">
+                <a:solidFill>
+                  <a:srgbClr val="1C2833"/>
+                </a:solidFill>
+                <a:latin typeface="Arial" pitchFamily="34" charset="0"/>
+                <a:ea typeface="Arial" pitchFamily="34" charset="-122"/>
+                <a:cs typeface="Arial" pitchFamily="34" charset="-120"/>
+              </a:rPr>
+              <a:t>Hand out the reflection slip — to complete tonight as homework:</a:t>
+            </a:r>
+            <a:endParaRPr lang="en-US" sz="1200" dirty="0"/>
+          </a:p>
+        </p:txBody>
+      </p:sp>
+      <p:sp>
+        <p:nvSpPr>
+          <p:cNvPr id="5" name="Text 3"/>
+          <p:cNvSpPr/>
+          <p:nvPr/>
+        </p:nvSpPr>
+        <p:spPr>
+          <a:xfrm>
+            <a:off x="406301" y="1754535"/>
+            <a:ext cx="8331398" cy="611981"/>
+          </a:xfrm>
+          <a:prstGeom prst="rect">
+            <a:avLst/>
+          </a:prstGeom>
+          <a:solidFill>
+            <a:srgbClr val="F4F8F9"/>
+          </a:solidFill>
+          <a:ln/>
+        </p:spPr>
+        <p:txBody>
+          <a:bodyPr wrap="square" rtlCol="0" anchor="ctr"/>
+          <a:lstStyle/>
+          <a:p>
+            <a:pPr indent="0" marL="0">
+              <a:buNone/>
+            </a:pPr>
+            <a:endParaRPr lang="en-US" dirty="0"/>
+          </a:p>
+        </p:txBody>
+      </p:sp>
+      <p:sp>
+        <p:nvSpPr>
+          <p:cNvPr id="6" name="Shape 4"/>
+          <p:cNvSpPr/>
+          <p:nvPr/>
+        </p:nvSpPr>
+        <p:spPr>
+          <a:xfrm>
+            <a:off x="434876" y="1754535"/>
+            <a:ext cx="0" cy="611981"/>
+          </a:xfrm>
+          <a:prstGeom prst="line">
+            <a:avLst/>
+          </a:prstGeom>
+          <a:noFill/>
+          <a:ln w="57150">
+            <a:solidFill>
+              <a:srgbClr val="FE4447"/>
+            </a:solidFill>
+            <a:prstDash val="solid"/>
+          </a:ln>
+        </p:spPr>
+      </p:sp>
+      <p:sp>
+        <p:nvSpPr>
+          <p:cNvPr id="7" name="Text 5"/>
+          <p:cNvSpPr/>
+          <p:nvPr/>
+        </p:nvSpPr>
+        <p:spPr>
+          <a:xfrm>
+            <a:off x="692051" y="1945035"/>
+            <a:ext cx="7973389" cy="230981"/>
+          </a:xfrm>
+          <a:prstGeom prst="rect">
+            <a:avLst/>
+          </a:prstGeom>
+          <a:noFill/>
+          <a:ln/>
+        </p:spPr>
+        <p:txBody>
+          <a:bodyPr wrap="square" lIns="0" tIns="0" rIns="0" bIns="0" rtlCol="0" anchor="t"/>
+          <a:lstStyle/>
+          <a:p>
+            <a:pPr algn="l" indent="0" marL="0">
+              <a:lnSpc>
+                <a:spcPts val="1820"/>
+              </a:lnSpc>
+              <a:spcBef>
+                <a:spcPts val="300"/>
+              </a:spcBef>
+              <a:spcAft>
+                <a:spcPts val="300"/>
+              </a:spcAft>
+              <a:buNone/>
+            </a:pPr>
+            <a:r>
+              <a:rPr lang="en-US" sz="1300" i="1" dirty="0">
+                <a:solidFill>
+                  <a:srgbClr val="1C2833"/>
+                </a:solidFill>
+                <a:latin typeface="Georgia" pitchFamily="34" charset="0"/>
+                <a:ea typeface="Georgia" pitchFamily="34" charset="-122"/>
+                <a:cs typeface="Georgia" pitchFamily="34" charset="-120"/>
+              </a:rPr>
+              <a:t>"What I set out to learn, what I actually learned, and one question I still have."</a:t>
+            </a:r>
+            <a:endParaRPr lang="en-US" sz="1300" dirty="0"/>
+          </a:p>
+        </p:txBody>
+      </p:sp>
+      <p:sp>
+        <p:nvSpPr>
+          <p:cNvPr id="8" name="Text 6"/>
+          <p:cNvSpPr/>
+          <p:nvPr/>
+        </p:nvSpPr>
+        <p:spPr>
+          <a:xfrm>
+            <a:off x="406301" y="4434929"/>
+            <a:ext cx="8498026" cy="213271"/>
+          </a:xfrm>
+          <a:prstGeom prst="rect">
+            <a:avLst/>
+          </a:prstGeom>
+          <a:noFill/>
+          <a:ln/>
+        </p:spPr>
+        <p:txBody>
+          <a:bodyPr wrap="square" lIns="0" tIns="0" rIns="0" bIns="0" rtlCol="0" anchor="t"/>
+          <a:lstStyle/>
+          <a:p>
+            <a:pPr algn="l" indent="0" marL="0">
+              <a:lnSpc>
+                <a:spcPts val="1680"/>
+              </a:lnSpc>
+              <a:spcBef>
+                <a:spcPts val="300"/>
+              </a:spcBef>
+              <a:spcAft>
+                <a:spcPts val="300"/>
+              </a:spcAft>
+              <a:buNone/>
+            </a:pPr>
+            <a:r>
+              <a:rPr lang="en-US" sz="1200" dirty="0">
+                <a:solidFill>
+                  <a:srgbClr val="1C2833"/>
+                </a:solidFill>
+                <a:latin typeface="Arial" pitchFamily="34" charset="0"/>
+                <a:ea typeface="Arial" pitchFamily="34" charset="-122"/>
+                <a:cs typeface="Arial" pitchFamily="34" charset="-120"/>
+              </a:rPr>
+              <a:t>Middle ·  · IKS Curriculum</a:t>
+            </a:r>
+            <a:endParaRPr lang="en-US" sz="1200" dirty="0"/>
+          </a:p>
+        </p:txBody>
+      </p:sp>
+    </p:spTree>
+  </p:cSld>
+  <p:clrMapOvr>
+    <a:masterClrMapping/>
+  </p:clrMapOvr>
+</p:sld>
+</file>
+
+<file path=ppt/slides/slide13.xml><?xml version="1.0" encoding="utf-8"?>
+<p:sld xmlns:a="http://schemas.openxmlformats.org/drawingml/2006/main" xmlns:r="http://schemas.openxmlformats.org/officeDocument/2006/relationships" xmlns:p="http://schemas.openxmlformats.org/presentationml/2006/main">
+  <p:cSld name="Slide 13">
+    <p:bg>
+      <p:bgPr>
+        <a:solidFill>
+          <a:srgbClr val="FFFFFF"/>
+        </a:solidFill>
+      </p:bgPr>
+    </p:bg>
+    <p:spTree>
+      <p:nvGrpSpPr>
+        <p:cNvPr id="1" name=""/>
+        <p:cNvGrpSpPr/>
+        <p:nvPr/>
+      </p:nvGrpSpPr>
+      <p:grpSpPr>
+        <a:xfrm>
+          <a:off x="0" y="0"/>
+          <a:ext cx="0" cy="0"/>
+          <a:chOff x="0" y="0"/>
+          <a:chExt cx="0" cy="0"/>
+        </a:xfrm>
+      </p:grpSpPr>
+      <p:sp>
+        <p:nvSpPr>
+          <p:cNvPr id="2" name="Text 0"/>
+          <p:cNvSpPr/>
+          <p:nvPr/>
+        </p:nvSpPr>
+        <p:spPr>
+          <a:xfrm>
+            <a:off x="0" y="0"/>
+            <a:ext cx="9144000" cy="101501"/>
+          </a:xfrm>
+          <a:prstGeom prst="rect">
+            <a:avLst/>
+          </a:prstGeom>
+          <a:solidFill>
+            <a:srgbClr val="277884"/>
+          </a:solidFill>
+          <a:ln/>
+        </p:spPr>
+        <p:txBody>
+          <a:bodyPr wrap="square" rtlCol="0" anchor="ctr"/>
+          <a:lstStyle/>
+          <a:p>
+            <a:pPr indent="0" marL="0">
+              <a:buNone/>
+            </a:pPr>
+            <a:endParaRPr lang="en-US" dirty="0"/>
+          </a:p>
+        </p:txBody>
+      </p:sp>
+      <p:sp>
+        <p:nvSpPr>
+          <p:cNvPr id="3" name="Text 1"/>
+          <p:cNvSpPr/>
+          <p:nvPr/>
+        </p:nvSpPr>
+        <p:spPr>
+          <a:xfrm>
+            <a:off x="406301" y="457051"/>
+            <a:ext cx="8498026" cy="274290"/>
+          </a:xfrm>
+          <a:prstGeom prst="rect">
+            <a:avLst/>
+          </a:prstGeom>
+          <a:noFill/>
+          <a:ln/>
+        </p:spPr>
+        <p:txBody>
+          <a:bodyPr wrap="square" lIns="0" tIns="0" rIns="0" bIns="0" rtlCol="0" anchor="t"/>
+          <a:lstStyle/>
+          <a:p>
+            <a:pPr algn="l" indent="0" marL="0">
+              <a:lnSpc>
+                <a:spcPts val="2160"/>
+              </a:lnSpc>
+              <a:spcBef>
+                <a:spcPts val="600"/>
+              </a:spcBef>
+              <a:spcAft>
+                <a:spcPts val="800"/>
+              </a:spcAft>
+              <a:buNone/>
+            </a:pPr>
+            <a:r>
+              <a:rPr lang="en-US" sz="1800" b="1" dirty="0">
+                <a:solidFill>
+                  <a:srgbClr val="FE4447"/>
+                </a:solidFill>
+                <a:latin typeface="Georgia" pitchFamily="34" charset="0"/>
+                <a:ea typeface="Georgia" pitchFamily="34" charset="-122"/>
+                <a:cs typeface="Georgia" pitchFamily="34" charset="-120"/>
+              </a:rPr>
+              <a:t>Student-facing content</a:t>
+            </a:r>
+            <a:endParaRPr lang="en-US" sz="1800" dirty="0"/>
+          </a:p>
+        </p:txBody>
+      </p:sp>
+      <p:sp>
+        <p:nvSpPr>
+          <p:cNvPr id="4" name="Text 2"/>
+          <p:cNvSpPr/>
+          <p:nvPr/>
+        </p:nvSpPr>
+        <p:spPr>
+          <a:xfrm>
+            <a:off x="406301" y="883593"/>
+            <a:ext cx="8331398" cy="1881187"/>
+          </a:xfrm>
+          <a:prstGeom prst="rect">
+            <a:avLst/>
+          </a:prstGeom>
+          <a:solidFill>
+            <a:srgbClr val="F4F8F9"/>
+          </a:solidFill>
+          <a:ln/>
+        </p:spPr>
+        <p:txBody>
+          <a:bodyPr wrap="square" rtlCol="0" anchor="ctr"/>
+          <a:lstStyle/>
+          <a:p>
+            <a:pPr indent="0" marL="0">
+              <a:buNone/>
+            </a:pPr>
+            <a:endParaRPr lang="en-US" dirty="0"/>
+          </a:p>
+        </p:txBody>
+      </p:sp>
+      <p:sp>
+        <p:nvSpPr>
+          <p:cNvPr id="5" name="Shape 3"/>
+          <p:cNvSpPr/>
+          <p:nvPr/>
+        </p:nvSpPr>
+        <p:spPr>
+          <a:xfrm>
+            <a:off x="434876" y="883593"/>
+            <a:ext cx="0" cy="1881187"/>
+          </a:xfrm>
+          <a:prstGeom prst="line">
+            <a:avLst/>
+          </a:prstGeom>
+          <a:noFill/>
+          <a:ln w="57150">
+            <a:solidFill>
+              <a:srgbClr val="FE4447"/>
+            </a:solidFill>
+            <a:prstDash val="solid"/>
+          </a:ln>
+        </p:spPr>
+      </p:sp>
+      <p:sp>
+        <p:nvSpPr>
+          <p:cNvPr id="6" name="Text 4"/>
+          <p:cNvSpPr/>
+          <p:nvPr/>
+        </p:nvSpPr>
+        <p:spPr>
+          <a:xfrm>
+            <a:off x="692051" y="1074093"/>
+            <a:ext cx="7973389" cy="230981"/>
+          </a:xfrm>
+          <a:prstGeom prst="rect">
+            <a:avLst/>
+          </a:prstGeom>
+          <a:noFill/>
+          <a:ln/>
+        </p:spPr>
+        <p:txBody>
+          <a:bodyPr wrap="square" lIns="0" tIns="0" rIns="0" bIns="0" rtlCol="0" anchor="t"/>
+          <a:lstStyle/>
+          <a:p>
+            <a:pPr algn="l" indent="0" marL="0">
+              <a:lnSpc>
+                <a:spcPts val="1820"/>
+              </a:lnSpc>
+              <a:spcBef>
+                <a:spcPts val="300"/>
+              </a:spcBef>
+              <a:spcAft>
+                <a:spcPts val="300"/>
+              </a:spcAft>
+              <a:buNone/>
+            </a:pPr>
+            <a:r>
+              <a:rPr lang="en-US" sz="1300" b="1" i="1" dirty="0">
+                <a:solidFill>
+                  <a:srgbClr val="1C2833"/>
+                </a:solidFill>
+                <a:latin typeface="Georgia" pitchFamily="34" charset="0"/>
+                <a:ea typeface="Georgia" pitchFamily="34" charset="-122"/>
+                <a:cs typeface="Georgia" pitchFamily="34" charset="-120"/>
+              </a:rPr>
+              <a:t>Today: build your 6-card herb deck.</a:t>
+            </a:r>
+            <a:endParaRPr lang="en-US" sz="1300" dirty="0"/>
+          </a:p>
+        </p:txBody>
+      </p:sp>
+      <p:sp>
+        <p:nvSpPr>
+          <p:cNvPr id="7" name="Text 5"/>
+          <p:cNvSpPr/>
+          <p:nvPr/>
+        </p:nvSpPr>
+        <p:spPr>
+          <a:xfrm>
+            <a:off x="692051" y="1343174"/>
+            <a:ext cx="7973389" cy="461963"/>
+          </a:xfrm>
+          <a:prstGeom prst="rect">
+            <a:avLst/>
+          </a:prstGeom>
+          <a:noFill/>
+          <a:ln/>
+        </p:spPr>
+        <p:txBody>
+          <a:bodyPr wrap="square" lIns="0" tIns="0" rIns="0" bIns="0" rtlCol="0" anchor="t"/>
+          <a:lstStyle/>
+          <a:p>
+            <a:pPr algn="l" indent="0" marL="0">
+              <a:lnSpc>
+                <a:spcPts val="1820"/>
+              </a:lnSpc>
+              <a:spcBef>
+                <a:spcPts val="300"/>
+              </a:spcBef>
+              <a:spcAft>
+                <a:spcPts val="300"/>
+              </a:spcAft>
+              <a:buNone/>
+            </a:pPr>
+            <a:r>
+              <a:rPr lang="en-US" sz="1300" i="1" dirty="0">
+                <a:solidFill>
+                  <a:srgbClr val="1C2833"/>
+                </a:solidFill>
+                <a:latin typeface="Georgia" pitchFamily="34" charset="0"/>
+                <a:ea typeface="Georgia" pitchFamily="34" charset="-122"/>
+                <a:cs typeface="Georgia" pitchFamily="34" charset="-120"/>
+              </a:rPr>
+              <a:t>Each card has eight things — sketch, Sanskrit name, English name, botanical name, family, three identifying features, active compound, and one traditional use + one safety note.</a:t>
+            </a:r>
+            <a:endParaRPr lang="en-US" sz="1300" dirty="0"/>
+          </a:p>
+        </p:txBody>
+      </p:sp>
+      <p:sp>
+        <p:nvSpPr>
+          <p:cNvPr id="8" name="Text 6"/>
+          <p:cNvSpPr/>
+          <p:nvPr/>
+        </p:nvSpPr>
+        <p:spPr>
+          <a:xfrm>
+            <a:off x="692051" y="1843236"/>
+            <a:ext cx="7973389" cy="230981"/>
+          </a:xfrm>
+          <a:prstGeom prst="rect">
+            <a:avLst/>
+          </a:prstGeom>
+          <a:noFill/>
+          <a:ln/>
+        </p:spPr>
+        <p:txBody>
+          <a:bodyPr wrap="square" lIns="0" tIns="0" rIns="0" bIns="0" rtlCol="0" anchor="t"/>
+          <a:lstStyle/>
+          <a:p>
+            <a:pPr algn="l" indent="0" marL="0">
+              <a:lnSpc>
+                <a:spcPts val="1820"/>
+              </a:lnSpc>
+              <a:spcBef>
+                <a:spcPts val="300"/>
+              </a:spcBef>
+              <a:spcAft>
+                <a:spcPts val="300"/>
+              </a:spcAft>
+              <a:buNone/>
+            </a:pPr>
+            <a:r>
+              <a:rPr lang="en-US" sz="1300" i="1" dirty="0">
+                <a:solidFill>
+                  <a:srgbClr val="1C2833"/>
+                </a:solidFill>
+                <a:latin typeface="Georgia" pitchFamily="34" charset="0"/>
+                <a:ea typeface="Georgia" pitchFamily="34" charset="-122"/>
+                <a:cs typeface="Georgia" pitchFamily="34" charset="-120"/>
+              </a:rPr>
+              <a:t>Quality over completeness — but all six cards must be drafted by end of class.</a:t>
+            </a:r>
+            <a:endParaRPr lang="en-US" sz="1300" dirty="0"/>
+          </a:p>
+        </p:txBody>
+      </p:sp>
+      <p:sp>
+        <p:nvSpPr>
+          <p:cNvPr id="9" name="Text 7"/>
+          <p:cNvSpPr/>
+          <p:nvPr/>
+        </p:nvSpPr>
+        <p:spPr>
+          <a:xfrm>
+            <a:off x="692051" y="2112318"/>
+            <a:ext cx="7973389" cy="461963"/>
+          </a:xfrm>
+          <a:prstGeom prst="rect">
+            <a:avLst/>
+          </a:prstGeom>
+          <a:noFill/>
+          <a:ln/>
+        </p:spPr>
+        <p:txBody>
+          <a:bodyPr wrap="square" lIns="0" tIns="0" rIns="0" bIns="0" rtlCol="0" anchor="t"/>
+          <a:lstStyle/>
+          <a:p>
+            <a:pPr algn="l" indent="0" marL="0">
+              <a:lnSpc>
+                <a:spcPts val="1820"/>
+              </a:lnSpc>
+              <a:spcBef>
+                <a:spcPts val="300"/>
+              </a:spcBef>
+              <a:spcAft>
+                <a:spcPts val="300"/>
+              </a:spcAft>
+              <a:buNone/>
+            </a:pPr>
+            <a:r>
+              <a:rPr lang="en-US" sz="1300" i="1" dirty="0">
+                <a:solidFill>
+                  <a:srgbClr val="1C2833"/>
+                </a:solidFill>
+                <a:latin typeface="Georgia" pitchFamily="34" charset="0"/>
+                <a:ea typeface="Georgia" pitchFamily="34" charset="-122"/>
+                <a:cs typeface="Georgia" pitchFamily="34" charset="-120"/>
+              </a:rPr>
+              <a:t>Use what you've already drawn and noted across Days 2–7. Your worksheets are your raw material; the cards are the polished version.</a:t>
+            </a:r>
+            <a:endParaRPr lang="en-US" sz="1300" dirty="0"/>
+          </a:p>
+        </p:txBody>
+      </p:sp>
+      <p:sp>
+        <p:nvSpPr>
+          <p:cNvPr id="10" name="Text 8"/>
+          <p:cNvSpPr/>
+          <p:nvPr/>
+        </p:nvSpPr>
+        <p:spPr>
+          <a:xfrm>
+            <a:off x="406301" y="4434929"/>
+            <a:ext cx="8498026" cy="213271"/>
+          </a:xfrm>
+          <a:prstGeom prst="rect">
+            <a:avLst/>
+          </a:prstGeom>
+          <a:noFill/>
+          <a:ln/>
+        </p:spPr>
+        <p:txBody>
+          <a:bodyPr wrap="square" lIns="0" tIns="0" rIns="0" bIns="0" rtlCol="0" anchor="t"/>
+          <a:lstStyle/>
+          <a:p>
+            <a:pPr algn="l" indent="0" marL="0">
+              <a:lnSpc>
+                <a:spcPts val="1680"/>
+              </a:lnSpc>
+              <a:spcBef>
+                <a:spcPts val="300"/>
+              </a:spcBef>
+              <a:spcAft>
+                <a:spcPts val="300"/>
+              </a:spcAft>
+              <a:buNone/>
+            </a:pPr>
+            <a:r>
+              <a:rPr lang="en-US" sz="1200" dirty="0">
+                <a:solidFill>
+                  <a:srgbClr val="1C2833"/>
+                </a:solidFill>
+                <a:latin typeface="Arial" pitchFamily="34" charset="0"/>
+                <a:ea typeface="Arial" pitchFamily="34" charset="-122"/>
+                <a:cs typeface="Arial" pitchFamily="34" charset="-120"/>
+              </a:rPr>
+              <a:t>Middle ·  · IKS Curriculum</a:t>
+            </a:r>
+            <a:endParaRPr lang="en-US" sz="1200" dirty="0"/>
+          </a:p>
+        </p:txBody>
+      </p:sp>
+    </p:spTree>
+  </p:cSld>
+  <p:clrMapOvr>
+    <a:masterClrMapping/>
+  </p:clrMapOvr>
+</p:sld>
+</file>
+
+<file path=ppt/slides/slide14.xml><?xml version="1.0" encoding="utf-8"?>
+<p:sld xmlns:a="http://schemas.openxmlformats.org/drawingml/2006/main" xmlns:r="http://schemas.openxmlformats.org/officeDocument/2006/relationships" xmlns:p="http://schemas.openxmlformats.org/presentationml/2006/main">
+  <p:cSld name="Slide 14">
+    <p:bg>
+      <p:bgPr>
+        <a:solidFill>
+          <a:srgbClr val="FFFFFF"/>
+        </a:solidFill>
+      </p:bgPr>
+    </p:bg>
+    <p:spTree>
+      <p:nvGrpSpPr>
+        <p:cNvPr id="1" name=""/>
+        <p:cNvGrpSpPr/>
+        <p:nvPr/>
+      </p:nvGrpSpPr>
+      <p:grpSpPr>
+        <a:xfrm>
+          <a:off x="0" y="0"/>
+          <a:ext cx="0" cy="0"/>
+          <a:chOff x="0" y="0"/>
+          <a:chExt cx="0" cy="0"/>
+        </a:xfrm>
+      </p:grpSpPr>
+      <p:sp>
+        <p:nvSpPr>
+          <p:cNvPr id="2" name="Text 0"/>
+          <p:cNvSpPr/>
+          <p:nvPr/>
+        </p:nvSpPr>
+        <p:spPr>
+          <a:xfrm>
+            <a:off x="0" y="0"/>
+            <a:ext cx="9144000" cy="101501"/>
+          </a:xfrm>
+          <a:prstGeom prst="rect">
+            <a:avLst/>
+          </a:prstGeom>
+          <a:solidFill>
+            <a:srgbClr val="277884"/>
+          </a:solidFill>
+          <a:ln/>
+        </p:spPr>
+        <p:txBody>
+          <a:bodyPr wrap="square" rtlCol="0" anchor="ctr"/>
+          <a:lstStyle/>
+          <a:p>
+            <a:pPr indent="0" marL="0">
+              <a:buNone/>
+            </a:pPr>
+            <a:endParaRPr lang="en-US" dirty="0"/>
+          </a:p>
+        </p:txBody>
+      </p:sp>
+      <p:sp>
+        <p:nvSpPr>
+          <p:cNvPr id="3" name="Text 1"/>
+          <p:cNvSpPr/>
+          <p:nvPr/>
+        </p:nvSpPr>
+        <p:spPr>
+          <a:xfrm>
+            <a:off x="406301" y="457051"/>
+            <a:ext cx="8498026" cy="274290"/>
+          </a:xfrm>
+          <a:prstGeom prst="rect">
+            <a:avLst/>
+          </a:prstGeom>
+          <a:noFill/>
+          <a:ln/>
+        </p:spPr>
+        <p:txBody>
+          <a:bodyPr wrap="square" lIns="0" tIns="0" rIns="0" bIns="0" rtlCol="0" anchor="t"/>
+          <a:lstStyle/>
+          <a:p>
+            <a:pPr algn="l" indent="0" marL="0">
+              <a:lnSpc>
+                <a:spcPts val="2160"/>
+              </a:lnSpc>
+              <a:spcBef>
+                <a:spcPts val="600"/>
+              </a:spcBef>
+              <a:spcAft>
+                <a:spcPts val="800"/>
+              </a:spcAft>
+              <a:buNone/>
+            </a:pPr>
+            <a:r>
+              <a:rPr lang="en-US" sz="1800" b="1" dirty="0">
+                <a:solidFill>
+                  <a:srgbClr val="FE4447"/>
+                </a:solidFill>
+                <a:latin typeface="Georgia" pitchFamily="34" charset="0"/>
+                <a:ea typeface="Georgia" pitchFamily="34" charset="-122"/>
+                <a:cs typeface="Georgia" pitchFamily="34" charset="-120"/>
+              </a:rPr>
+              <a:t>Homework</a:t>
+            </a:r>
+            <a:endParaRPr lang="en-US" sz="1800" dirty="0"/>
+          </a:p>
+        </p:txBody>
+      </p:sp>
+      <p:sp>
+        <p:nvSpPr>
+          <p:cNvPr id="4" name="Text 2"/>
+          <p:cNvSpPr/>
+          <p:nvPr/>
+        </p:nvSpPr>
+        <p:spPr>
+          <a:xfrm>
+            <a:off x="634901" y="883593"/>
+            <a:ext cx="8102798" cy="769441"/>
+          </a:xfrm>
+          <a:prstGeom prst="rect">
+            <a:avLst/>
+          </a:prstGeom>
+          <a:noFill/>
+          <a:ln/>
+        </p:spPr>
+        <p:txBody>
+          <a:bodyPr wrap="square" lIns="0" tIns="0" rIns="0" bIns="0" rtlCol="0" anchor="t"/>
+          <a:lstStyle/>
+          <a:p>
+            <a:pPr algn="l" marL="342900" indent="-342900">
+              <a:lnSpc>
+                <a:spcPts val="1620"/>
+              </a:lnSpc>
+              <a:spcAft>
+                <a:spcPts val="300"/>
+              </a:spcAft>
+              <a:buSzPct val="100000"/>
+              <a:buChar char="•"/>
+            </a:pPr>
+            <a:r>
+              <a:rPr lang="en-US" sz="1200" dirty="0">
+                <a:solidFill>
+                  <a:srgbClr val="1C2833"/>
+                </a:solidFill>
+                <a:latin typeface="Arial" pitchFamily="34" charset="0"/>
+                <a:ea typeface="Arial" pitchFamily="34" charset="-122"/>
+                <a:cs typeface="Arial" pitchFamily="34" charset="-120"/>
+              </a:rPr>
+              <a:t>Finalise any card you didn't complete in class.</a:t>
+            </a:r>
+            <a:endParaRPr lang="en-US" sz="1200" dirty="0"/>
+          </a:p>
+          <a:p>
+            <a:pPr algn="l" marL="342900" indent="-342900">
+              <a:lnSpc>
+                <a:spcPts val="1620"/>
+              </a:lnSpc>
+              <a:spcAft>
+                <a:spcPts val="300"/>
+              </a:spcAft>
+              <a:buSzPct val="100000"/>
+              <a:buChar char="•"/>
+            </a:pPr>
+            <a:r>
+              <a:rPr lang="en-US" sz="1200" dirty="0">
+                <a:solidFill>
+                  <a:srgbClr val="1C2833"/>
+                </a:solidFill>
+                <a:latin typeface="Arial" pitchFamily="34" charset="0"/>
+                <a:ea typeface="Arial" pitchFamily="34" charset="-122"/>
+                <a:cs typeface="Arial" pitchFamily="34" charset="-120"/>
+              </a:rPr>
+              <a:t>Complete the reflection slip.</a:t>
+            </a:r>
+            <a:endParaRPr lang="en-US" sz="1200" dirty="0"/>
+          </a:p>
+          <a:p>
+            <a:pPr algn="l" marL="342900" indent="-342900">
+              <a:lnSpc>
+                <a:spcPts val="1620"/>
+              </a:lnSpc>
+              <a:spcAft>
+                <a:spcPts val="300"/>
+              </a:spcAft>
+              <a:buSzPct val="100000"/>
+              <a:buChar char="•"/>
+            </a:pPr>
+            <a:r>
+              <a:rPr lang="en-US" sz="1200" dirty="0">
+                <a:solidFill>
+                  <a:srgbClr val="1C2833"/>
+                </a:solidFill>
+                <a:latin typeface="Arial" pitchFamily="34" charset="0"/>
+                <a:ea typeface="Arial" pitchFamily="34" charset="-122"/>
+                <a:cs typeface="Arial" pitchFamily="34" charset="-120"/>
+              </a:rPr>
+              <a:t>Bring all six cards + reflection slip + pencils to Day 10.</a:t>
+            </a:r>
+            <a:endParaRPr lang="en-US" sz="1200" dirty="0"/>
+          </a:p>
+        </p:txBody>
+      </p:sp>
+      <p:sp>
+        <p:nvSpPr>
+          <p:cNvPr id="5" name="Text 3"/>
+          <p:cNvSpPr/>
+          <p:nvPr/>
+        </p:nvSpPr>
+        <p:spPr>
+          <a:xfrm>
+            <a:off x="406301" y="4434929"/>
+            <a:ext cx="8498026" cy="213271"/>
+          </a:xfrm>
+          <a:prstGeom prst="rect">
+            <a:avLst/>
+          </a:prstGeom>
+          <a:noFill/>
+          <a:ln/>
+        </p:spPr>
+        <p:txBody>
+          <a:bodyPr wrap="square" lIns="0" tIns="0" rIns="0" bIns="0" rtlCol="0" anchor="t"/>
+          <a:lstStyle/>
+          <a:p>
+            <a:pPr algn="l" indent="0" marL="0">
+              <a:lnSpc>
+                <a:spcPts val="1680"/>
+              </a:lnSpc>
+              <a:spcBef>
+                <a:spcPts val="300"/>
+              </a:spcBef>
+              <a:spcAft>
+                <a:spcPts val="300"/>
+              </a:spcAft>
+              <a:buNone/>
+            </a:pPr>
+            <a:r>
+              <a:rPr lang="en-US" sz="1200" dirty="0">
+                <a:solidFill>
+                  <a:srgbClr val="1C2833"/>
+                </a:solidFill>
+                <a:latin typeface="Arial" pitchFamily="34" charset="0"/>
+                <a:ea typeface="Arial" pitchFamily="34" charset="-122"/>
+                <a:cs typeface="Arial" pitchFamily="34" charset="-120"/>
+              </a:rPr>
+              <a:t>Middle ·  · IKS Curriculum</a:t>
+            </a:r>
+            <a:endParaRPr lang="en-US" sz="1200" dirty="0"/>
+          </a:p>
+        </p:txBody>
+      </p:sp>
+    </p:spTree>
+  </p:cSld>
+  <p:clrMapOvr>
+    <a:masterClrMapping/>
+  </p:clrMapOvr>
+</p:sld>
+</file>
+
+<file path=ppt/slides/slide15.xml><?xml version="1.0" encoding="utf-8"?>
+<p:sld xmlns:a="http://schemas.openxmlformats.org/drawingml/2006/main" xmlns:r="http://schemas.openxmlformats.org/officeDocument/2006/relationships" xmlns:p="http://schemas.openxmlformats.org/presentationml/2006/main">
+  <p:cSld name="Slide 15">
+    <p:bg>
+      <p:bgPr>
+        <a:solidFill>
+          <a:srgbClr val="FFFFFF"/>
+        </a:solidFill>
+      </p:bgPr>
+    </p:bg>
+    <p:spTree>
+      <p:nvGrpSpPr>
+        <p:cNvPr id="1" name=""/>
+        <p:cNvGrpSpPr/>
+        <p:nvPr/>
+      </p:nvGrpSpPr>
+      <p:grpSpPr>
+        <a:xfrm>
+          <a:off x="0" y="0"/>
+          <a:ext cx="0" cy="0"/>
+          <a:chOff x="0" y="0"/>
+          <a:chExt cx="0" cy="0"/>
+        </a:xfrm>
+      </p:grpSpPr>
+      <p:sp>
+        <p:nvSpPr>
+          <p:cNvPr id="2" name="Text 0"/>
+          <p:cNvSpPr/>
+          <p:nvPr/>
+        </p:nvSpPr>
+        <p:spPr>
+          <a:xfrm>
+            <a:off x="0" y="0"/>
+            <a:ext cx="9144000" cy="101501"/>
+          </a:xfrm>
+          <a:prstGeom prst="rect">
+            <a:avLst/>
+          </a:prstGeom>
+          <a:solidFill>
+            <a:srgbClr val="277884"/>
+          </a:solidFill>
+          <a:ln/>
+        </p:spPr>
+        <p:txBody>
+          <a:bodyPr wrap="square" rtlCol="0" anchor="ctr"/>
+          <a:lstStyle/>
+          <a:p>
+            <a:pPr indent="0" marL="0">
+              <a:buNone/>
+            </a:pPr>
+            <a:endParaRPr lang="en-US" dirty="0"/>
+          </a:p>
+        </p:txBody>
+      </p:sp>
+      <p:sp>
+        <p:nvSpPr>
+          <p:cNvPr id="3" name="Text 1"/>
+          <p:cNvSpPr/>
+          <p:nvPr/>
+        </p:nvSpPr>
+        <p:spPr>
+          <a:xfrm>
+            <a:off x="406301" y="457051"/>
+            <a:ext cx="8498026" cy="274290"/>
+          </a:xfrm>
+          <a:prstGeom prst="rect">
+            <a:avLst/>
+          </a:prstGeom>
+          <a:noFill/>
+          <a:ln/>
+        </p:spPr>
+        <p:txBody>
+          <a:bodyPr wrap="square" lIns="0" tIns="0" rIns="0" bIns="0" rtlCol="0" anchor="t"/>
+          <a:lstStyle/>
+          <a:p>
+            <a:pPr algn="l" indent="0" marL="0">
+              <a:lnSpc>
+                <a:spcPts val="2160"/>
+              </a:lnSpc>
+              <a:spcBef>
+                <a:spcPts val="600"/>
+              </a:spcBef>
+              <a:spcAft>
+                <a:spcPts val="800"/>
+              </a:spcAft>
+              <a:buNone/>
+            </a:pPr>
+            <a:r>
+              <a:rPr lang="en-US" sz="1800" b="1" dirty="0">
+                <a:solidFill>
+                  <a:srgbClr val="FE4447"/>
+                </a:solidFill>
+                <a:latin typeface="Georgia" pitchFamily="34" charset="0"/>
+                <a:ea typeface="Georgia" pitchFamily="34" charset="-122"/>
+                <a:cs typeface="Georgia" pitchFamily="34" charset="-120"/>
+              </a:rPr>
+              <a:t>Differentiation</a:t>
+            </a:r>
+            <a:endParaRPr lang="en-US" sz="1800" dirty="0"/>
+          </a:p>
+        </p:txBody>
+      </p:sp>
+      <p:sp>
+        <p:nvSpPr>
+          <p:cNvPr id="4" name="Text 2"/>
+          <p:cNvSpPr/>
+          <p:nvPr/>
+        </p:nvSpPr>
+        <p:spPr>
+          <a:xfrm>
+            <a:off x="634901" y="883593"/>
+            <a:ext cx="8102798" cy="937022"/>
+          </a:xfrm>
+          <a:prstGeom prst="rect">
+            <a:avLst/>
+          </a:prstGeom>
+          <a:noFill/>
+          <a:ln/>
+        </p:spPr>
+        <p:txBody>
+          <a:bodyPr wrap="square" lIns="0" tIns="0" rIns="0" bIns="0" rtlCol="0" anchor="t"/>
+          <a:lstStyle/>
+          <a:p>
+            <a:pPr algn="l" marL="342900" indent="-342900">
+              <a:lnSpc>
+                <a:spcPts val="1620"/>
+              </a:lnSpc>
+              <a:spcAft>
+                <a:spcPts val="300"/>
+              </a:spcAft>
+              <a:buSzPct val="100000"/>
+              <a:buChar char="•"/>
+            </a:pPr>
+            <a:r>
+              <a:rPr lang="en-US" sz="1200" b="1" dirty="0">
+                <a:solidFill>
+                  <a:srgbClr val="1C2833"/>
+                </a:solidFill>
+                <a:latin typeface="Arial" pitchFamily="34" charset="0"/>
+                <a:ea typeface="Arial" pitchFamily="34" charset="-122"/>
+                <a:cs typeface="Arial" pitchFamily="34" charset="-120"/>
+              </a:rPr>
+              <a:t>One tier up:</a:t>
+            </a:r>
+            <a:pPr algn="l" indent="0" marL="0">
+              <a:lnSpc>
+                <a:spcPts val="1620"/>
+              </a:lnSpc>
+              <a:spcAft>
+                <a:spcPts val="300"/>
+              </a:spcAft>
+              <a:buNone/>
+            </a:pPr>
+            <a:r>
+              <a:rPr lang="en-US" sz="1200" dirty="0">
+                <a:solidFill>
+                  <a:srgbClr val="1C2833"/>
+                </a:solidFill>
+                <a:latin typeface="Arial" pitchFamily="34" charset="0"/>
+                <a:ea typeface="Arial" pitchFamily="34" charset="-122"/>
+                <a:cs typeface="Arial" pitchFamily="34" charset="-120"/>
+              </a:rPr>
+              <a:t> Make a </a:t>
+            </a:r>
+            <a:pPr algn="l" indent="0" marL="0">
+              <a:lnSpc>
+                <a:spcPts val="1620"/>
+              </a:lnSpc>
+              <a:spcAft>
+                <a:spcPts val="300"/>
+              </a:spcAft>
+              <a:buNone/>
+            </a:pPr>
+            <a:r>
+              <a:rPr lang="en-US" sz="1200" b="1" dirty="0">
+                <a:solidFill>
+                  <a:srgbClr val="1C2833"/>
+                </a:solidFill>
+                <a:latin typeface="Arial" pitchFamily="34" charset="0"/>
+                <a:ea typeface="Arial" pitchFamily="34" charset="-122"/>
+                <a:cs typeface="Arial" pitchFamily="34" charset="-120"/>
+              </a:rPr>
+              <a:t>7th card</a:t>
+            </a:r>
+            <a:pPr algn="l" indent="0" marL="0">
+              <a:lnSpc>
+                <a:spcPts val="1620"/>
+              </a:lnSpc>
+              <a:spcAft>
+                <a:spcPts val="300"/>
+              </a:spcAft>
+              <a:buNone/>
+            </a:pPr>
+            <a:r>
+              <a:rPr lang="en-US" sz="1200" dirty="0">
+                <a:solidFill>
+                  <a:srgbClr val="1C2833"/>
+                </a:solidFill>
+                <a:latin typeface="Arial" pitchFamily="34" charset="0"/>
+                <a:ea typeface="Arial" pitchFamily="34" charset="-122"/>
+                <a:cs typeface="Arial" pitchFamily="34" charset="-120"/>
+              </a:rPr>
+              <a:t> for a herb of your choice — </a:t>
+            </a:r>
+            <a:pPr algn="l" indent="0" marL="0">
+              <a:lnSpc>
+                <a:spcPts val="1620"/>
+              </a:lnSpc>
+              <a:spcAft>
+                <a:spcPts val="300"/>
+              </a:spcAft>
+              <a:buNone/>
+            </a:pPr>
+            <a:r>
+              <a:rPr lang="en-US" sz="1200" i="1" dirty="0">
+                <a:solidFill>
+                  <a:srgbClr val="1C2833"/>
+                </a:solidFill>
+                <a:latin typeface="Arial" pitchFamily="34" charset="0"/>
+                <a:ea typeface="Arial" pitchFamily="34" charset="-122"/>
+                <a:cs typeface="Arial" pitchFamily="34" charset="-120"/>
+              </a:rPr>
+              <a:t>aśvagandhā</a:t>
+            </a:r>
+            <a:pPr algn="l" indent="0" marL="0">
+              <a:lnSpc>
+                <a:spcPts val="1620"/>
+              </a:lnSpc>
+              <a:spcAft>
+                <a:spcPts val="300"/>
+              </a:spcAft>
+              <a:buNone/>
+            </a:pPr>
+            <a:r>
+              <a:rPr lang="en-US" sz="1200" dirty="0">
+                <a:solidFill>
+                  <a:srgbClr val="1C2833"/>
+                </a:solidFill>
+                <a:latin typeface="Arial" pitchFamily="34" charset="0"/>
+                <a:ea typeface="Arial" pitchFamily="34" charset="-122"/>
+                <a:cs typeface="Arial" pitchFamily="34" charset="-120"/>
+              </a:rPr>
+              <a:t>, </a:t>
+            </a:r>
+            <a:pPr algn="l" indent="0" marL="0">
+              <a:lnSpc>
+                <a:spcPts val="1620"/>
+              </a:lnSpc>
+              <a:spcAft>
+                <a:spcPts val="300"/>
+              </a:spcAft>
+              <a:buNone/>
+            </a:pPr>
+            <a:r>
+              <a:rPr lang="en-US" sz="1200" i="1" dirty="0">
+                <a:solidFill>
+                  <a:srgbClr val="1C2833"/>
+                </a:solidFill>
+                <a:latin typeface="Arial" pitchFamily="34" charset="0"/>
+                <a:ea typeface="Arial" pitchFamily="34" charset="-122"/>
+                <a:cs typeface="Arial" pitchFamily="34" charset="-120"/>
+              </a:rPr>
+              <a:t>brāhmī</a:t>
+            </a:r>
+            <a:pPr algn="l" indent="0" marL="0">
+              <a:lnSpc>
+                <a:spcPts val="1620"/>
+              </a:lnSpc>
+              <a:spcAft>
+                <a:spcPts val="300"/>
+              </a:spcAft>
+              <a:buNone/>
+            </a:pPr>
+            <a:r>
+              <a:rPr lang="en-US" sz="1200" dirty="0">
+                <a:solidFill>
+                  <a:srgbClr val="1C2833"/>
+                </a:solidFill>
+                <a:latin typeface="Arial" pitchFamily="34" charset="0"/>
+                <a:ea typeface="Arial" pitchFamily="34" charset="-122"/>
+                <a:cs typeface="Arial" pitchFamily="34" charset="-120"/>
+              </a:rPr>
+              <a:t>, </a:t>
+            </a:r>
+            <a:pPr algn="l" indent="0" marL="0">
+              <a:lnSpc>
+                <a:spcPts val="1620"/>
+              </a:lnSpc>
+              <a:spcAft>
+                <a:spcPts val="300"/>
+              </a:spcAft>
+              <a:buNone/>
+            </a:pPr>
+            <a:r>
+              <a:rPr lang="en-US" sz="1200" i="1" dirty="0">
+                <a:solidFill>
+                  <a:srgbClr val="1C2833"/>
+                </a:solidFill>
+                <a:latin typeface="Arial" pitchFamily="34" charset="0"/>
+                <a:ea typeface="Arial" pitchFamily="34" charset="-122"/>
+                <a:cs typeface="Arial" pitchFamily="34" charset="-120"/>
+              </a:rPr>
+              <a:t>triphalā</a:t>
+            </a:r>
+            <a:pPr algn="l" indent="0" marL="0">
+              <a:lnSpc>
+                <a:spcPts val="1620"/>
+              </a:lnSpc>
+              <a:spcAft>
+                <a:spcPts val="300"/>
+              </a:spcAft>
+              <a:buNone/>
+            </a:pPr>
+            <a:r>
+              <a:rPr lang="en-US" sz="1200" dirty="0">
+                <a:solidFill>
+                  <a:srgbClr val="1C2833"/>
+                </a:solidFill>
+                <a:latin typeface="Arial" pitchFamily="34" charset="0"/>
+                <a:ea typeface="Arial" pitchFamily="34" charset="-122"/>
+                <a:cs typeface="Arial" pitchFamily="34" charset="-120"/>
+              </a:rPr>
+              <a:t>, </a:t>
+            </a:r>
+            <a:pPr algn="l" indent="0" marL="0">
+              <a:lnSpc>
+                <a:spcPts val="1620"/>
+              </a:lnSpc>
+              <a:spcAft>
+                <a:spcPts val="300"/>
+              </a:spcAft>
+              <a:buNone/>
+            </a:pPr>
+            <a:r>
+              <a:rPr lang="en-US" sz="1200" i="1" dirty="0">
+                <a:solidFill>
+                  <a:srgbClr val="1C2833"/>
+                </a:solidFill>
+                <a:latin typeface="Arial" pitchFamily="34" charset="0"/>
+                <a:ea typeface="Arial" pitchFamily="34" charset="-122"/>
+                <a:cs typeface="Arial" pitchFamily="34" charset="-120"/>
+              </a:rPr>
+              <a:t>kariveppilai</a:t>
+            </a:r>
+            <a:pPr algn="l" indent="0" marL="0">
+              <a:lnSpc>
+                <a:spcPts val="1620"/>
+              </a:lnSpc>
+              <a:spcAft>
+                <a:spcPts val="300"/>
+              </a:spcAft>
+              <a:buNone/>
+            </a:pPr>
+            <a:r>
+              <a:rPr lang="en-US" sz="1200" dirty="0">
+                <a:solidFill>
+                  <a:srgbClr val="1C2833"/>
+                </a:solidFill>
+                <a:latin typeface="Arial" pitchFamily="34" charset="0"/>
+                <a:ea typeface="Arial" pitchFamily="34" charset="-122"/>
+                <a:cs typeface="Arial" pitchFamily="34" charset="-120"/>
+              </a:rPr>
+              <a:t> (curry leaf), or </a:t>
+            </a:r>
+            <a:pPr algn="l" indent="0" marL="0">
+              <a:lnSpc>
+                <a:spcPts val="1620"/>
+              </a:lnSpc>
+              <a:spcAft>
+                <a:spcPts val="300"/>
+              </a:spcAft>
+              <a:buNone/>
+            </a:pPr>
+            <a:r>
+              <a:rPr lang="en-US" sz="1200" i="1" dirty="0">
+                <a:solidFill>
+                  <a:srgbClr val="1C2833"/>
+                </a:solidFill>
+                <a:latin typeface="Arial" pitchFamily="34" charset="0"/>
+                <a:ea typeface="Arial" pitchFamily="34" charset="-122"/>
+                <a:cs typeface="Arial" pitchFamily="34" charset="-120"/>
+              </a:rPr>
+              <a:t>dhānyaka</a:t>
+            </a:r>
+            <a:pPr algn="l" indent="0" marL="0">
+              <a:lnSpc>
+                <a:spcPts val="1620"/>
+              </a:lnSpc>
+              <a:spcAft>
+                <a:spcPts val="300"/>
+              </a:spcAft>
+              <a:buNone/>
+            </a:pPr>
+            <a:r>
+              <a:rPr lang="en-US" sz="1200" dirty="0">
+                <a:solidFill>
+                  <a:srgbClr val="1C2833"/>
+                </a:solidFill>
+                <a:latin typeface="Arial" pitchFamily="34" charset="0"/>
+                <a:ea typeface="Arial" pitchFamily="34" charset="-122"/>
+                <a:cs typeface="Arial" pitchFamily="34" charset="-120"/>
+              </a:rPr>
+              <a:t> (coriander). Apply the same eight-element template.</a:t>
+            </a:r>
+            <a:endParaRPr lang="en-US" sz="1200" dirty="0"/>
+          </a:p>
+          <a:p>
+            <a:pPr algn="l" marL="342900" indent="-342900">
+              <a:lnSpc>
+                <a:spcPts val="1620"/>
+              </a:lnSpc>
+              <a:spcAft>
+                <a:spcPts val="300"/>
+              </a:spcAft>
+              <a:buSzPct val="100000"/>
+              <a:buChar char="•"/>
+            </a:pPr>
+            <a:r>
+              <a:rPr lang="en-US" sz="1200" b="1" dirty="0">
+                <a:solidFill>
+                  <a:srgbClr val="1C2833"/>
+                </a:solidFill>
+                <a:latin typeface="Arial" pitchFamily="34" charset="0"/>
+                <a:ea typeface="Arial" pitchFamily="34" charset="-122"/>
+                <a:cs typeface="Arial" pitchFamily="34" charset="-120"/>
+              </a:rPr>
+              <a:t>One tier down:</a:t>
+            </a:r>
+            <a:pPr algn="l" indent="0" marL="0">
+              <a:lnSpc>
+                <a:spcPts val="1620"/>
+              </a:lnSpc>
+              <a:spcAft>
+                <a:spcPts val="300"/>
+              </a:spcAft>
+              <a:buNone/>
+            </a:pPr>
+            <a:r>
+              <a:rPr lang="en-US" sz="1200" dirty="0">
+                <a:solidFill>
+                  <a:srgbClr val="1C2833"/>
+                </a:solidFill>
+                <a:latin typeface="Arial" pitchFamily="34" charset="0"/>
+                <a:ea typeface="Arial" pitchFamily="34" charset="-122"/>
+                <a:cs typeface="Arial" pitchFamily="34" charset="-120"/>
+              </a:rPr>
+              <a:t> Make 4 cards (drop turmeric and ajwain if compressed) — but each must have all 8 elements. Quality over quantity.</a:t>
+            </a:r>
+            <a:endParaRPr lang="en-US" sz="1200" dirty="0"/>
+          </a:p>
+        </p:txBody>
+      </p:sp>
+      <p:sp>
+        <p:nvSpPr>
+          <p:cNvPr id="5" name="Text 3"/>
+          <p:cNvSpPr/>
+          <p:nvPr/>
+        </p:nvSpPr>
+        <p:spPr>
+          <a:xfrm>
+            <a:off x="406301" y="4434929"/>
+            <a:ext cx="8498026" cy="213271"/>
+          </a:xfrm>
+          <a:prstGeom prst="rect">
+            <a:avLst/>
+          </a:prstGeom>
+          <a:noFill/>
+          <a:ln/>
+        </p:spPr>
+        <p:txBody>
+          <a:bodyPr wrap="square" lIns="0" tIns="0" rIns="0" bIns="0" rtlCol="0" anchor="t"/>
+          <a:lstStyle/>
+          <a:p>
+            <a:pPr algn="l" indent="0" marL="0">
+              <a:lnSpc>
+                <a:spcPts val="1680"/>
+              </a:lnSpc>
+              <a:spcBef>
+                <a:spcPts val="300"/>
+              </a:spcBef>
+              <a:spcAft>
+                <a:spcPts val="300"/>
+              </a:spcAft>
+              <a:buNone/>
+            </a:pPr>
+            <a:r>
+              <a:rPr lang="en-US" sz="1200" dirty="0">
+                <a:solidFill>
+                  <a:srgbClr val="1C2833"/>
+                </a:solidFill>
+                <a:latin typeface="Arial" pitchFamily="34" charset="0"/>
+                <a:ea typeface="Arial" pitchFamily="34" charset="-122"/>
+                <a:cs typeface="Arial" pitchFamily="34" charset="-120"/>
+              </a:rPr>
+              <a:t>Middle ·  · IKS Curriculum</a:t>
+            </a:r>
+            <a:endParaRPr lang="en-US" sz="1200" dirty="0"/>
+          </a:p>
+        </p:txBody>
+      </p:sp>
+    </p:spTree>
+  </p:cSld>
+  <p:clrMapOvr>
+    <a:masterClrMapping/>
+  </p:clrMapOvr>
+</p:sld>
+</file>
+
+<file path=ppt/slides/slide16.xml><?xml version="1.0" encoding="utf-8"?>
+<p:sld xmlns:a="http://schemas.openxmlformats.org/drawingml/2006/main" xmlns:r="http://schemas.openxmlformats.org/officeDocument/2006/relationships" xmlns:p="http://schemas.openxmlformats.org/presentationml/2006/main">
+  <p:cSld name="Slide 16">
+    <p:bg>
+      <p:bgPr>
+        <a:solidFill>
+          <a:srgbClr val="FFFFFF"/>
+        </a:solidFill>
+      </p:bgPr>
+    </p:bg>
+    <p:spTree>
+      <p:nvGrpSpPr>
+        <p:cNvPr id="1" name=""/>
+        <p:cNvGrpSpPr/>
+        <p:nvPr/>
+      </p:nvGrpSpPr>
+      <p:grpSpPr>
+        <a:xfrm>
+          <a:off x="0" y="0"/>
+          <a:ext cx="0" cy="0"/>
+          <a:chOff x="0" y="0"/>
+          <a:chExt cx="0" cy="0"/>
+        </a:xfrm>
+      </p:grpSpPr>
+      <p:sp>
+        <p:nvSpPr>
+          <p:cNvPr id="2" name="Text 0"/>
+          <p:cNvSpPr/>
+          <p:nvPr/>
+        </p:nvSpPr>
+        <p:spPr>
+          <a:xfrm>
+            <a:off x="0" y="0"/>
+            <a:ext cx="9144000" cy="101501"/>
+          </a:xfrm>
+          <a:prstGeom prst="rect">
+            <a:avLst/>
+          </a:prstGeom>
+          <a:solidFill>
+            <a:srgbClr val="277884"/>
+          </a:solidFill>
+          <a:ln/>
+        </p:spPr>
+        <p:txBody>
+          <a:bodyPr wrap="square" rtlCol="0" anchor="ctr"/>
+          <a:lstStyle/>
+          <a:p>
+            <a:pPr indent="0" marL="0">
+              <a:buNone/>
+            </a:pPr>
+            <a:endParaRPr lang="en-US" dirty="0"/>
+          </a:p>
+        </p:txBody>
+      </p:sp>
+      <p:sp>
+        <p:nvSpPr>
+          <p:cNvPr id="3" name="Text 1"/>
+          <p:cNvSpPr/>
+          <p:nvPr/>
+        </p:nvSpPr>
+        <p:spPr>
+          <a:xfrm>
+            <a:off x="406301" y="457051"/>
+            <a:ext cx="8498026" cy="274290"/>
+          </a:xfrm>
+          <a:prstGeom prst="rect">
+            <a:avLst/>
+          </a:prstGeom>
+          <a:noFill/>
+          <a:ln/>
+        </p:spPr>
+        <p:txBody>
+          <a:bodyPr wrap="square" lIns="0" tIns="0" rIns="0" bIns="0" rtlCol="0" anchor="t"/>
+          <a:lstStyle/>
+          <a:p>
+            <a:pPr algn="l" indent="0" marL="0">
+              <a:lnSpc>
+                <a:spcPts val="2160"/>
+              </a:lnSpc>
+              <a:spcBef>
+                <a:spcPts val="600"/>
+              </a:spcBef>
+              <a:spcAft>
+                <a:spcPts val="800"/>
+              </a:spcAft>
+              <a:buNone/>
+            </a:pPr>
+            <a:r>
+              <a:rPr lang="en-US" sz="1800" b="1" dirty="0">
+                <a:solidFill>
+                  <a:srgbClr val="FE4447"/>
+                </a:solidFill>
+                <a:latin typeface="Georgia" pitchFamily="34" charset="0"/>
+                <a:ea typeface="Georgia" pitchFamily="34" charset="-122"/>
+                <a:cs typeface="Georgia" pitchFamily="34" charset="-120"/>
+              </a:rPr>
+              <a:t>Teacher notes</a:t>
+            </a:r>
+            <a:endParaRPr lang="en-US" sz="1800" dirty="0"/>
+          </a:p>
+        </p:txBody>
+      </p:sp>
+      <p:sp>
+        <p:nvSpPr>
+          <p:cNvPr id="4" name="Text 2"/>
+          <p:cNvSpPr/>
+          <p:nvPr/>
+        </p:nvSpPr>
+        <p:spPr>
+          <a:xfrm>
+            <a:off x="634901" y="883593"/>
+            <a:ext cx="8102798" cy="1180802"/>
+          </a:xfrm>
+          <a:prstGeom prst="rect">
+            <a:avLst/>
+          </a:prstGeom>
+          <a:noFill/>
+          <a:ln/>
+        </p:spPr>
+        <p:txBody>
+          <a:bodyPr wrap="square" lIns="0" tIns="0" rIns="0" bIns="0" rtlCol="0" anchor="t"/>
+          <a:lstStyle/>
+          <a:p>
+            <a:pPr algn="l" marL="342900" indent="-342900">
+              <a:lnSpc>
+                <a:spcPts val="1620"/>
+              </a:lnSpc>
+              <a:spcAft>
+                <a:spcPts val="300"/>
+              </a:spcAft>
+              <a:buSzPct val="100000"/>
+              <a:buChar char="•"/>
+            </a:pPr>
+            <a:r>
+              <a:rPr lang="en-US" sz="1200" dirty="0">
+                <a:solidFill>
+                  <a:srgbClr val="1C2833"/>
+                </a:solidFill>
+                <a:latin typeface="Arial" pitchFamily="34" charset="0"/>
+                <a:ea typeface="Arial" pitchFamily="34" charset="-122"/>
+                <a:cs typeface="Arial" pitchFamily="34" charset="-120"/>
+              </a:rPr>
+              <a:t>This is a build session, not a teaching session. Resist the urge to lecture. Walk around. Ask questions. Point at gaps.</a:t>
+            </a:r>
+            <a:endParaRPr lang="en-US" sz="1200" dirty="0"/>
+          </a:p>
+          <a:p>
+            <a:pPr algn="l" marL="342900" indent="-342900">
+              <a:lnSpc>
+                <a:spcPts val="1620"/>
+              </a:lnSpc>
+              <a:spcAft>
+                <a:spcPts val="300"/>
+              </a:spcAft>
+              <a:buSzPct val="100000"/>
+              <a:buChar char="•"/>
+            </a:pPr>
+            <a:r>
+              <a:rPr lang="en-US" sz="1200" dirty="0">
+                <a:solidFill>
+                  <a:srgbClr val="1C2833"/>
+                </a:solidFill>
+                <a:latin typeface="Arial" pitchFamily="34" charset="0"/>
+                <a:ea typeface="Arial" pitchFamily="34" charset="-122"/>
+                <a:cs typeface="Arial" pitchFamily="34" charset="-120"/>
+              </a:rPr>
+              <a:t>Common failure mode: pairs spend the first 15 min discussing what to draw and end up with one half-card. Set the timer visible. Push pace.</a:t>
+            </a:r>
+            <a:endParaRPr lang="en-US" sz="1200" dirty="0"/>
+          </a:p>
+          <a:p>
+            <a:pPr algn="l" marL="342900" indent="-342900">
+              <a:lnSpc>
+                <a:spcPts val="1620"/>
+              </a:lnSpc>
+              <a:spcAft>
+                <a:spcPts val="300"/>
+              </a:spcAft>
+              <a:buSzPct val="100000"/>
+              <a:buChar char="•"/>
+            </a:pPr>
+            <a:r>
+              <a:rPr lang="en-US" sz="1200" dirty="0">
+                <a:solidFill>
+                  <a:srgbClr val="1C2833"/>
+                </a:solidFill>
+                <a:latin typeface="Arial" pitchFamily="34" charset="0"/>
+                <a:ea typeface="Arial" pitchFamily="34" charset="-122"/>
+                <a:cs typeface="Arial" pitchFamily="34" charset="-120"/>
+              </a:rPr>
+              <a:t>Common failure mode: one partner draws while the other watches. Reassign — partner A does 3 cards in pen, partner B does 3 cards in pen, then they swap and refine each other's.</a:t>
+            </a:r>
+            <a:endParaRPr lang="en-US" sz="1200" dirty="0"/>
+          </a:p>
+        </p:txBody>
+      </p:sp>
+      <p:sp>
+        <p:nvSpPr>
+          <p:cNvPr id="5" name="Text 3"/>
+          <p:cNvSpPr/>
+          <p:nvPr/>
+        </p:nvSpPr>
+        <p:spPr>
+          <a:xfrm>
+            <a:off x="406301" y="4434929"/>
+            <a:ext cx="8498026" cy="213271"/>
+          </a:xfrm>
+          <a:prstGeom prst="rect">
+            <a:avLst/>
+          </a:prstGeom>
+          <a:noFill/>
+          <a:ln/>
+        </p:spPr>
+        <p:txBody>
+          <a:bodyPr wrap="square" lIns="0" tIns="0" rIns="0" bIns="0" rtlCol="0" anchor="t"/>
+          <a:lstStyle/>
+          <a:p>
+            <a:pPr algn="l" indent="0" marL="0">
+              <a:lnSpc>
+                <a:spcPts val="1680"/>
+              </a:lnSpc>
+              <a:spcBef>
+                <a:spcPts val="300"/>
+              </a:spcBef>
+              <a:spcAft>
+                <a:spcPts val="300"/>
+              </a:spcAft>
+              <a:buNone/>
+            </a:pPr>
+            <a:r>
+              <a:rPr lang="en-US" sz="1200" dirty="0">
+                <a:solidFill>
+                  <a:srgbClr val="1C2833"/>
+                </a:solidFill>
+                <a:latin typeface="Arial" pitchFamily="34" charset="0"/>
+                <a:ea typeface="Arial" pitchFamily="34" charset="-122"/>
+                <a:cs typeface="Arial" pitchFamily="34" charset="-120"/>
+              </a:rPr>
+              <a:t>Middle ·  · IKS Curriculum</a:t>
+            </a:r>
+            <a:endParaRPr lang="en-US" sz="1200" dirty="0"/>
+          </a:p>
+        </p:txBody>
+      </p:sp>
+    </p:spTree>
+  </p:cSld>
+  <p:clrMapOvr>
+    <a:masterClrMapping/>
+  </p:clrMapOvr>
+</p:sld>
+</file>
+
+<file path=ppt/slides/slide17.xml><?xml version="1.0" encoding="utf-8"?>
+<p:sld xmlns:a="http://schemas.openxmlformats.org/drawingml/2006/main" xmlns:r="http://schemas.openxmlformats.org/officeDocument/2006/relationships" xmlns:p="http://schemas.openxmlformats.org/presentationml/2006/main">
+  <p:cSld name="Slide 17">
+    <p:bg>
+      <p:bgPr>
+        <a:solidFill>
+          <a:srgbClr val="FFFFFF"/>
+        </a:solidFill>
+      </p:bgPr>
+    </p:bg>
+    <p:spTree>
+      <p:nvGrpSpPr>
+        <p:cNvPr id="1" name=""/>
+        <p:cNvGrpSpPr/>
+        <p:nvPr/>
+      </p:nvGrpSpPr>
+      <p:grpSpPr>
+        <a:xfrm>
+          <a:off x="0" y="0"/>
+          <a:ext cx="0" cy="0"/>
+          <a:chOff x="0" y="0"/>
+          <a:chExt cx="0" cy="0"/>
+        </a:xfrm>
+      </p:grpSpPr>
+      <p:sp>
+        <p:nvSpPr>
+          <p:cNvPr id="2" name="Text 0"/>
+          <p:cNvSpPr/>
+          <p:nvPr/>
+        </p:nvSpPr>
+        <p:spPr>
+          <a:xfrm>
+            <a:off x="0" y="0"/>
+            <a:ext cx="9144000" cy="101501"/>
+          </a:xfrm>
+          <a:prstGeom prst="rect">
+            <a:avLst/>
+          </a:prstGeom>
+          <a:solidFill>
+            <a:srgbClr val="277884"/>
+          </a:solidFill>
+          <a:ln/>
+        </p:spPr>
+        <p:txBody>
+          <a:bodyPr wrap="square" rtlCol="0" anchor="ctr"/>
+          <a:lstStyle/>
+          <a:p>
+            <a:pPr indent="0" marL="0">
+              <a:buNone/>
+            </a:pPr>
+            <a:endParaRPr lang="en-US" dirty="0"/>
+          </a:p>
+        </p:txBody>
+      </p:sp>
+      <p:sp>
+        <p:nvSpPr>
+          <p:cNvPr id="3" name="Text 1"/>
+          <p:cNvSpPr/>
+          <p:nvPr/>
+        </p:nvSpPr>
+        <p:spPr>
+          <a:xfrm>
+            <a:off x="406301" y="457051"/>
+            <a:ext cx="8498026" cy="274290"/>
+          </a:xfrm>
+          <a:prstGeom prst="rect">
+            <a:avLst/>
+          </a:prstGeom>
+          <a:noFill/>
+          <a:ln/>
+        </p:spPr>
+        <p:txBody>
+          <a:bodyPr wrap="square" lIns="0" tIns="0" rIns="0" bIns="0" rtlCol="0" anchor="t"/>
+          <a:lstStyle/>
+          <a:p>
+            <a:pPr algn="l" indent="0" marL="0">
+              <a:lnSpc>
+                <a:spcPts val="2160"/>
+              </a:lnSpc>
+              <a:spcBef>
+                <a:spcPts val="600"/>
+              </a:spcBef>
+              <a:spcAft>
+                <a:spcPts val="800"/>
+              </a:spcAft>
+              <a:buNone/>
+            </a:pPr>
+            <a:r>
+              <a:rPr lang="en-US" sz="1800" b="1" dirty="0">
+                <a:solidFill>
+                  <a:srgbClr val="FE4447"/>
+                </a:solidFill>
+                <a:latin typeface="Georgia" pitchFamily="34" charset="0"/>
+                <a:ea typeface="Georgia" pitchFamily="34" charset="-122"/>
+                <a:cs typeface="Georgia" pitchFamily="34" charset="-120"/>
+              </a:rPr>
+              <a:t>Citation(s) used in this lesson</a:t>
+            </a:r>
+            <a:endParaRPr lang="en-US" sz="1800" dirty="0"/>
+          </a:p>
+        </p:txBody>
+      </p:sp>
+      <p:sp>
+        <p:nvSpPr>
+          <p:cNvPr id="4" name="Text 2"/>
+          <p:cNvSpPr/>
+          <p:nvPr/>
+        </p:nvSpPr>
+        <p:spPr>
+          <a:xfrm>
+            <a:off x="634901" y="883593"/>
+            <a:ext cx="8102798" cy="563761"/>
+          </a:xfrm>
+          <a:prstGeom prst="rect">
+            <a:avLst/>
+          </a:prstGeom>
+          <a:noFill/>
+          <a:ln/>
+        </p:spPr>
+        <p:txBody>
+          <a:bodyPr wrap="square" lIns="0" tIns="0" rIns="0" bIns="0" rtlCol="0" anchor="t"/>
+          <a:lstStyle/>
+          <a:p>
+            <a:pPr algn="l" marL="342900" indent="-342900">
+              <a:lnSpc>
+                <a:spcPts val="1620"/>
+              </a:lnSpc>
+              <a:spcAft>
+                <a:spcPts val="300"/>
+              </a:spcAft>
+              <a:buSzPct val="100000"/>
+              <a:buChar char="•"/>
+            </a:pPr>
+            <a:r>
+              <a:rPr lang="en-US" sz="1200" dirty="0">
+                <a:solidFill>
+                  <a:srgbClr val="1C2833"/>
+                </a:solidFill>
+                <a:latin typeface="Arial" pitchFamily="34" charset="0"/>
+                <a:ea typeface="Arial" pitchFamily="34" charset="-122"/>
+                <a:cs typeface="Arial" pitchFamily="34" charset="-120"/>
+              </a:rPr>
+              <a:t>Project brief — </a:t>
+            </a:r>
+            <a:pPr algn="l" indent="0" marL="0">
+              <a:lnSpc>
+                <a:spcPts val="1620"/>
+              </a:lnSpc>
+              <a:spcAft>
+                <a:spcPts val="300"/>
+              </a:spcAft>
+              <a:buNone/>
+            </a:pPr>
+            <a:r>
+              <a:rPr lang="en-US" sz="1200" dirty="0">
+                <a:solidFill>
+                  <a:srgbClr val="1C2833"/>
+                </a:solidFill>
+                <a:latin typeface="Arial" pitchFamily="34" charset="0"/>
+                <a:ea typeface="Arial" pitchFamily="34" charset="-122"/>
+                <a:cs typeface="Arial" pitchFamily="34" charset="-120"/>
+              </a:rPr>
               <a:t>assessments/project-brief.md</a:t>
             </a:r>
-            <a:pPr algn="l" indent="0" marL="0">
-              <a:lnSpc>
-                <a:spcPts val="1680"/>
-              </a:lnSpc>
-              <a:spcBef>
-                <a:spcPts val="300"/>
-              </a:spcBef>
-              <a:spcAft>
-                <a:spcPts val="300"/>
-              </a:spcAft>
-              <a:buNone/>
+            <a:endParaRPr lang="en-US" sz="1200" dirty="0"/>
+          </a:p>
+          <a:p>
+            <a:pPr algn="l" marL="342900" indent="-342900">
+              <a:lnSpc>
+                <a:spcPts val="1620"/>
+              </a:lnSpc>
+              <a:spcAft>
+                <a:spcPts val="300"/>
+              </a:spcAft>
+              <a:buSzPct val="100000"/>
+              <a:buChar char="•"/>
             </a:pPr>
             <a:r>
               <a:rPr lang="en-US" sz="1200" dirty="0">
@@ -2597,15 +5077,12 @@
                 <a:ea typeface="Arial" pitchFamily="34" charset="-122"/>
                 <a:cs typeface="Arial" pitchFamily="34" charset="-120"/>
               </a:rPr>
-              <a:t> – Rubric — </a:t>
-            </a:r>
-            <a:pPr algn="l" indent="0" marL="0">
-              <a:lnSpc>
-                <a:spcPts val="1680"/>
-              </a:lnSpc>
-              <a:spcBef>
-                <a:spcPts val="300"/>
-              </a:spcBef>
+              <a:t>Rubric — </a:t>
+            </a:r>
+            <a:pPr algn="l" indent="0" marL="0">
+              <a:lnSpc>
+                <a:spcPts val="1620"/>
+              </a:lnSpc>
               <a:spcAft>
                 <a:spcPts val="300"/>
               </a:spcAft>
@@ -2778,7 +5255,7 @@
                 <a:ea typeface="Georgia" pitchFamily="34" charset="-122"/>
                 <a:cs typeface="Georgia" pitchFamily="34" charset="-120"/>
               </a:rPr>
-              <a:t>Materials</a:t>
+              <a:t>Learning objective</a:t>
             </a:r>
             <a:endParaRPr lang="en-US" sz="1800" dirty="0"/>
           </a:p>
@@ -2793,7 +5270,7 @@
         <p:spPr>
           <a:xfrm>
             <a:off x="406301" y="870942"/>
-            <a:ext cx="8498026" cy="658862"/>
+            <a:ext cx="8498026" cy="426541"/>
           </a:xfrm>
           <a:prstGeom prst="rect">
             <a:avLst/>
@@ -2826,7 +5303,7 @@
                 <a:ea typeface="Arial" pitchFamily="34" charset="-122"/>
                 <a:cs typeface="Arial" pitchFamily="34" charset="-120"/>
               </a:rPr>
-              <a:t>– Pre-cut A6 (or quarter-A4) cards — 6 per pair, plus 2 spares – Colour pencils, fine-tip markers, scale rulers – Reference: students' Day 2–8 worksheets (instruct them to bring these) – Project brief (</a:t>
+              <a:t>By the end of this lesson, each pair has produced </a:t>
             </a:r>
             <a:pPr algn="l" indent="0" marL="0">
               <a:lnSpc>
@@ -2841,6 +5318,29 @@
               <a:buNone/>
             </a:pPr>
             <a:r>
+              <a:rPr lang="en-US" sz="1200" b="1" dirty="0">
+                <a:solidFill>
+                  <a:srgbClr val="1C2833"/>
+                </a:solidFill>
+                <a:latin typeface="Arial" pitchFamily="34" charset="0"/>
+                <a:ea typeface="Arial" pitchFamily="34" charset="-122"/>
+                <a:cs typeface="Arial" pitchFamily="34" charset="-120"/>
+              </a:rPr>
+              <a:t>all six cards</a:t>
+            </a:r>
+            <a:pPr algn="l" indent="0" marL="0">
+              <a:lnSpc>
+                <a:spcPts val="1680"/>
+              </a:lnSpc>
+              <a:spcBef>
+                <a:spcPts val="300"/>
+              </a:spcBef>
+              <a:spcAft>
+                <a:spcPts val="300"/>
+              </a:spcAft>
+              <a:buNone/>
+            </a:pPr>
+            <a:r>
               <a:rPr lang="en-US" sz="1200" dirty="0">
                 <a:solidFill>
                   <a:srgbClr val="1C2833"/>
@@ -2849,76 +5349,7 @@
                 <a:ea typeface="Arial" pitchFamily="34" charset="-122"/>
                 <a:cs typeface="Arial" pitchFamily="34" charset="-120"/>
               </a:rPr>
-              <a:t>assessments/project-brief.md</a:t>
-            </a:r>
-            <a:pPr algn="l" indent="0" marL="0">
-              <a:lnSpc>
-                <a:spcPts val="1680"/>
-              </a:lnSpc>
-              <a:spcBef>
-                <a:spcPts val="300"/>
-              </a:spcBef>
-              <a:spcAft>
-                <a:spcPts val="300"/>
-              </a:spcAft>
-              <a:buNone/>
-            </a:pPr>
-            <a:r>
-              <a:rPr lang="en-US" sz="1200" dirty="0">
-                <a:solidFill>
-                  <a:srgbClr val="1C2833"/>
-                </a:solidFill>
-                <a:latin typeface="Arial" pitchFamily="34" charset="0"/>
-                <a:ea typeface="Arial" pitchFamily="34" charset="-122"/>
-                <a:cs typeface="Arial" pitchFamily="34" charset="-120"/>
-              </a:rPr>
-              <a:t>) printed and visible – Rubric (</a:t>
-            </a:r>
-            <a:pPr algn="l" indent="0" marL="0">
-              <a:lnSpc>
-                <a:spcPts val="1680"/>
-              </a:lnSpc>
-              <a:spcBef>
-                <a:spcPts val="300"/>
-              </a:spcBef>
-              <a:spcAft>
-                <a:spcPts val="300"/>
-              </a:spcAft>
-              <a:buNone/>
-            </a:pPr>
-            <a:r>
-              <a:rPr lang="en-US" sz="1200" dirty="0">
-                <a:solidFill>
-                  <a:srgbClr val="1C2833"/>
-                </a:solidFill>
-                <a:latin typeface="Arial" pitchFamily="34" charset="0"/>
-                <a:ea typeface="Arial" pitchFamily="34" charset="-122"/>
-                <a:cs typeface="Arial" pitchFamily="34" charset="-120"/>
-              </a:rPr>
-              <a:t>assessments/rubric.md</a:t>
-            </a:r>
-            <a:pPr algn="l" indent="0" marL="0">
-              <a:lnSpc>
-                <a:spcPts val="1680"/>
-              </a:lnSpc>
-              <a:spcBef>
-                <a:spcPts val="300"/>
-              </a:spcBef>
-              <a:spcAft>
-                <a:spcPts val="300"/>
-              </a:spcAft>
-              <a:buNone/>
-            </a:pPr>
-            <a:r>
-              <a:rPr lang="en-US" sz="1200" dirty="0">
-                <a:solidFill>
-                  <a:srgbClr val="1C2833"/>
-                </a:solidFill>
-                <a:latin typeface="Arial" pitchFamily="34" charset="0"/>
-                <a:ea typeface="Arial" pitchFamily="34" charset="-122"/>
-                <a:cs typeface="Arial" pitchFamily="34" charset="-120"/>
-              </a:rPr>
-              <a:t>) printed and visible</a:t>
+              <a:t> in draft form, each containing the eight required elements (see below). The cards are ready for finalising at home and presenting on Day 10.</a:t>
             </a:r>
             <a:endParaRPr lang="en-US" sz="1200" dirty="0"/>
           </a:p>
@@ -3076,7 +5507,7 @@
                 <a:ea typeface="Georgia" pitchFamily="34" charset="-122"/>
                 <a:cs typeface="Georgia" pitchFamily="34" charset="-120"/>
               </a:rPr>
-              <a:t>Lesson flow</a:t>
+              <a:t>Materials</a:t>
             </a:r>
             <a:endParaRPr lang="en-US" sz="1800" dirty="0"/>
           </a:p>
@@ -3085,6 +5516,228 @@
       <p:sp>
         <p:nvSpPr>
           <p:cNvPr id="4" name="Text 2"/>
+          <p:cNvSpPr/>
+          <p:nvPr/>
+        </p:nvSpPr>
+        <p:spPr>
+          <a:xfrm>
+            <a:off x="634901" y="883593"/>
+            <a:ext cx="8102798" cy="1295102"/>
+          </a:xfrm>
+          <a:prstGeom prst="rect">
+            <a:avLst/>
+          </a:prstGeom>
+          <a:noFill/>
+          <a:ln/>
+        </p:spPr>
+        <p:txBody>
+          <a:bodyPr wrap="square" lIns="0" tIns="0" rIns="0" bIns="0" rtlCol="0" anchor="t"/>
+          <a:lstStyle/>
+          <a:p>
+            <a:pPr algn="l" marL="342900" indent="-342900">
+              <a:lnSpc>
+                <a:spcPts val="1620"/>
+              </a:lnSpc>
+              <a:spcAft>
+                <a:spcPts val="300"/>
+              </a:spcAft>
+              <a:buSzPct val="100000"/>
+              <a:buChar char="•"/>
+            </a:pPr>
+            <a:r>
+              <a:rPr lang="en-US" sz="1200" dirty="0">
+                <a:solidFill>
+                  <a:srgbClr val="1C2833"/>
+                </a:solidFill>
+                <a:latin typeface="Arial" pitchFamily="34" charset="0"/>
+                <a:ea typeface="Arial" pitchFamily="34" charset="-122"/>
+                <a:cs typeface="Arial" pitchFamily="34" charset="-120"/>
+              </a:rPr>
+              <a:t>Pre-cut A6 (or quarter-A4) cards — 6 per pair, plus 2 spares</a:t>
+            </a:r>
+            <a:endParaRPr lang="en-US" sz="1200" dirty="0"/>
+          </a:p>
+          <a:p>
+            <a:pPr algn="l" marL="342900" indent="-342900">
+              <a:lnSpc>
+                <a:spcPts val="1620"/>
+              </a:lnSpc>
+              <a:spcAft>
+                <a:spcPts val="300"/>
+              </a:spcAft>
+              <a:buSzPct val="100000"/>
+              <a:buChar char="•"/>
+            </a:pPr>
+            <a:r>
+              <a:rPr lang="en-US" sz="1200" dirty="0">
+                <a:solidFill>
+                  <a:srgbClr val="1C2833"/>
+                </a:solidFill>
+                <a:latin typeface="Arial" pitchFamily="34" charset="0"/>
+                <a:ea typeface="Arial" pitchFamily="34" charset="-122"/>
+                <a:cs typeface="Arial" pitchFamily="34" charset="-120"/>
+              </a:rPr>
+              <a:t>Colour pencils, fine-tip markers, scale rulers</a:t>
+            </a:r>
+            <a:endParaRPr lang="en-US" sz="1200" dirty="0"/>
+          </a:p>
+          <a:p>
+            <a:pPr algn="l" marL="342900" indent="-342900">
+              <a:lnSpc>
+                <a:spcPts val="1620"/>
+              </a:lnSpc>
+              <a:spcAft>
+                <a:spcPts val="300"/>
+              </a:spcAft>
+              <a:buSzPct val="100000"/>
+              <a:buChar char="•"/>
+            </a:pPr>
+            <a:r>
+              <a:rPr lang="en-US" sz="1200" dirty="0">
+                <a:solidFill>
+                  <a:srgbClr val="1C2833"/>
+                </a:solidFill>
+                <a:latin typeface="Arial" pitchFamily="34" charset="0"/>
+                <a:ea typeface="Arial" pitchFamily="34" charset="-122"/>
+                <a:cs typeface="Arial" pitchFamily="34" charset="-120"/>
+              </a:rPr>
+              <a:t>Reference: students' Day 2–8 worksheets (instruct them to bring these)</a:t>
+            </a:r>
+            <a:endParaRPr lang="en-US" sz="1200" dirty="0"/>
+          </a:p>
+          <a:p>
+            <a:pPr algn="l" marL="342900" indent="-342900">
+              <a:lnSpc>
+                <a:spcPts val="1620"/>
+              </a:lnSpc>
+              <a:spcAft>
+                <a:spcPts val="300"/>
+              </a:spcAft>
+              <a:buSzPct val="100000"/>
+              <a:buChar char="•"/>
+            </a:pPr>
+            <a:r>
+              <a:rPr lang="en-US" sz="1200" dirty="0">
+                <a:solidFill>
+                  <a:srgbClr val="1C2833"/>
+                </a:solidFill>
+                <a:latin typeface="Arial" pitchFamily="34" charset="0"/>
+                <a:ea typeface="Arial" pitchFamily="34" charset="-122"/>
+                <a:cs typeface="Arial" pitchFamily="34" charset="-120"/>
+              </a:rPr>
+              <a:t>Project brief (</a:t>
+            </a:r>
+            <a:pPr algn="l" indent="0" marL="0">
+              <a:lnSpc>
+                <a:spcPts val="1620"/>
+              </a:lnSpc>
+              <a:spcAft>
+                <a:spcPts val="300"/>
+              </a:spcAft>
+              <a:buNone/>
+            </a:pPr>
+            <a:r>
+              <a:rPr lang="en-US" sz="1200" dirty="0">
+                <a:solidFill>
+                  <a:srgbClr val="1C2833"/>
+                </a:solidFill>
+                <a:latin typeface="Arial" pitchFamily="34" charset="0"/>
+                <a:ea typeface="Arial" pitchFamily="34" charset="-122"/>
+                <a:cs typeface="Arial" pitchFamily="34" charset="-120"/>
+              </a:rPr>
+              <a:t>assessments/project-brief.md</a:t>
+            </a:r>
+            <a:pPr algn="l" indent="0" marL="0">
+              <a:lnSpc>
+                <a:spcPts val="1620"/>
+              </a:lnSpc>
+              <a:spcAft>
+                <a:spcPts val="300"/>
+              </a:spcAft>
+              <a:buNone/>
+            </a:pPr>
+            <a:r>
+              <a:rPr lang="en-US" sz="1200" dirty="0">
+                <a:solidFill>
+                  <a:srgbClr val="1C2833"/>
+                </a:solidFill>
+                <a:latin typeface="Arial" pitchFamily="34" charset="0"/>
+                <a:ea typeface="Arial" pitchFamily="34" charset="-122"/>
+                <a:cs typeface="Arial" pitchFamily="34" charset="-120"/>
+              </a:rPr>
+              <a:t>) printed and visible</a:t>
+            </a:r>
+            <a:endParaRPr lang="en-US" sz="1200" dirty="0"/>
+          </a:p>
+          <a:p>
+            <a:pPr algn="l" marL="342900" indent="-342900">
+              <a:lnSpc>
+                <a:spcPts val="1620"/>
+              </a:lnSpc>
+              <a:spcAft>
+                <a:spcPts val="300"/>
+              </a:spcAft>
+              <a:buSzPct val="100000"/>
+              <a:buChar char="•"/>
+            </a:pPr>
+            <a:r>
+              <a:rPr lang="en-US" sz="1200" dirty="0">
+                <a:solidFill>
+                  <a:srgbClr val="1C2833"/>
+                </a:solidFill>
+                <a:latin typeface="Arial" pitchFamily="34" charset="0"/>
+                <a:ea typeface="Arial" pitchFamily="34" charset="-122"/>
+                <a:cs typeface="Arial" pitchFamily="34" charset="-120"/>
+              </a:rPr>
+              <a:t>Rubric (</a:t>
+            </a:r>
+            <a:pPr algn="l" indent="0" marL="0">
+              <a:lnSpc>
+                <a:spcPts val="1620"/>
+              </a:lnSpc>
+              <a:spcAft>
+                <a:spcPts val="300"/>
+              </a:spcAft>
+              <a:buNone/>
+            </a:pPr>
+            <a:r>
+              <a:rPr lang="en-US" sz="1200" dirty="0">
+                <a:solidFill>
+                  <a:srgbClr val="1C2833"/>
+                </a:solidFill>
+                <a:latin typeface="Arial" pitchFamily="34" charset="0"/>
+                <a:ea typeface="Arial" pitchFamily="34" charset="-122"/>
+                <a:cs typeface="Arial" pitchFamily="34" charset="-120"/>
+              </a:rPr>
+              <a:t>assessments/rubric.md</a:t>
+            </a:r>
+            <a:pPr algn="l" indent="0" marL="0">
+              <a:lnSpc>
+                <a:spcPts val="1620"/>
+              </a:lnSpc>
+              <a:spcAft>
+                <a:spcPts val="300"/>
+              </a:spcAft>
+              <a:buNone/>
+            </a:pPr>
+            <a:r>
+              <a:rPr lang="en-US" sz="1200" dirty="0">
+                <a:solidFill>
+                  <a:srgbClr val="1C2833"/>
+                </a:solidFill>
+                <a:latin typeface="Arial" pitchFamily="34" charset="0"/>
+                <a:ea typeface="Arial" pitchFamily="34" charset="-122"/>
+                <a:cs typeface="Arial" pitchFamily="34" charset="-120"/>
+              </a:rPr>
+              <a:t>) printed and visible</a:t>
+            </a:r>
+            <a:endParaRPr lang="en-US" sz="1200" dirty="0"/>
+          </a:p>
+        </p:txBody>
+      </p:sp>
+      <p:sp>
+        <p:nvSpPr>
+          <p:cNvPr id="5" name="Text 3"/>
           <p:cNvSpPr/>
           <p:nvPr/>
         </p:nvSpPr>
@@ -3234,7 +5887,7 @@
                 <a:ea typeface="Georgia" pitchFamily="34" charset="-122"/>
                 <a:cs typeface="Georgia" pitchFamily="34" charset="-120"/>
               </a:rPr>
-              <a:t>Warm-up (5 min)</a:t>
+              <a:t>Lesson flow</a:t>
             </a:r>
             <a:endParaRPr lang="en-US" sz="1800" dirty="0"/>
           </a:p>
@@ -3243,556 +5896,6 @@
       <p:sp>
         <p:nvSpPr>
           <p:cNvPr id="4" name="Text 2"/>
-          <p:cNvSpPr/>
-          <p:nvPr/>
-        </p:nvSpPr>
-        <p:spPr>
-          <a:xfrm>
-            <a:off x="406301" y="870942"/>
-            <a:ext cx="8498026" cy="213271"/>
-          </a:xfrm>
-          <a:prstGeom prst="rect">
-            <a:avLst/>
-          </a:prstGeom>
-          <a:noFill/>
-          <a:ln/>
-        </p:spPr>
-        <p:txBody>
-          <a:bodyPr wrap="square" lIns="0" tIns="0" rIns="0" bIns="0" rtlCol="0" anchor="t"/>
-          <a:lstStyle/>
-          <a:p>
-            <a:pPr algn="l" indent="0" marL="0">
-              <a:lnSpc>
-                <a:spcPts val="1680"/>
-              </a:lnSpc>
-              <a:spcBef>
-                <a:spcPts val="300"/>
-              </a:spcBef>
-              <a:spcAft>
-                <a:spcPts val="300"/>
-              </a:spcAft>
-              <a:buNone/>
-            </a:pPr>
-            <a:r>
-              <a:rPr lang="en-US" sz="1200" dirty="0">
-                <a:solidFill>
-                  <a:srgbClr val="1C2833"/>
-                </a:solidFill>
-                <a:latin typeface="Arial" pitchFamily="34" charset="0"/>
-                <a:ea typeface="Arial" pitchFamily="34" charset="-122"/>
-                <a:cs typeface="Arial" pitchFamily="34" charset="-120"/>
-              </a:rPr>
-              <a:t>Read the project brief aloud (one student volunteers).</a:t>
-            </a:r>
-            <a:endParaRPr lang="en-US" sz="1200" dirty="0"/>
-          </a:p>
-        </p:txBody>
-      </p:sp>
-      <p:sp>
-        <p:nvSpPr>
-          <p:cNvPr id="5" name="Text 3"/>
-          <p:cNvSpPr/>
-          <p:nvPr/>
-        </p:nvSpPr>
-        <p:spPr>
-          <a:xfrm>
-            <a:off x="406301" y="1160413"/>
-            <a:ext cx="8498026" cy="213271"/>
-          </a:xfrm>
-          <a:prstGeom prst="rect">
-            <a:avLst/>
-          </a:prstGeom>
-          <a:noFill/>
-          <a:ln/>
-        </p:spPr>
-        <p:txBody>
-          <a:bodyPr wrap="square" lIns="0" tIns="0" rIns="0" bIns="0" rtlCol="0" anchor="t"/>
-          <a:lstStyle/>
-          <a:p>
-            <a:pPr algn="l" indent="0" marL="0">
-              <a:lnSpc>
-                <a:spcPts val="1680"/>
-              </a:lnSpc>
-              <a:spcBef>
-                <a:spcPts val="300"/>
-              </a:spcBef>
-              <a:spcAft>
-                <a:spcPts val="300"/>
-              </a:spcAft>
-              <a:buNone/>
-            </a:pPr>
-            <a:r>
-              <a:rPr lang="en-US" sz="1200" dirty="0">
-                <a:solidFill>
-                  <a:srgbClr val="1C2833"/>
-                </a:solidFill>
-                <a:latin typeface="Arial" pitchFamily="34" charset="0"/>
-                <a:ea typeface="Arial" pitchFamily="34" charset="-122"/>
-                <a:cs typeface="Arial" pitchFamily="34" charset="-120"/>
-              </a:rPr>
-              <a:t>Restate the </a:t>
-            </a:r>
-            <a:pPr algn="l" indent="0" marL="0">
-              <a:lnSpc>
-                <a:spcPts val="1680"/>
-              </a:lnSpc>
-              <a:spcBef>
-                <a:spcPts val="300"/>
-              </a:spcBef>
-              <a:spcAft>
-                <a:spcPts val="300"/>
-              </a:spcAft>
-              <a:buNone/>
-            </a:pPr>
-            <a:r>
-              <a:rPr lang="en-US" sz="1200" b="1" dirty="0">
-                <a:solidFill>
-                  <a:srgbClr val="1C2833"/>
-                </a:solidFill>
-                <a:latin typeface="Arial" pitchFamily="34" charset="0"/>
-                <a:ea typeface="Arial" pitchFamily="34" charset="-122"/>
-                <a:cs typeface="Arial" pitchFamily="34" charset="-120"/>
-              </a:rPr>
-              <a:t>eight required elements</a:t>
-            </a:r>
-            <a:pPr algn="l" indent="0" marL="0">
-              <a:lnSpc>
-                <a:spcPts val="1680"/>
-              </a:lnSpc>
-              <a:spcBef>
-                <a:spcPts val="300"/>
-              </a:spcBef>
-              <a:spcAft>
-                <a:spcPts val="300"/>
-              </a:spcAft>
-              <a:buNone/>
-            </a:pPr>
-            <a:r>
-              <a:rPr lang="en-US" sz="1200" dirty="0">
-                <a:solidFill>
-                  <a:srgbClr val="1C2833"/>
-                </a:solidFill>
-                <a:latin typeface="Arial" pitchFamily="34" charset="0"/>
-                <a:ea typeface="Arial" pitchFamily="34" charset="-122"/>
-                <a:cs typeface="Arial" pitchFamily="34" charset="-120"/>
-              </a:rPr>
-              <a:t> on each card:</a:t>
-            </a:r>
-            <a:endParaRPr lang="en-US" sz="1200" dirty="0"/>
-          </a:p>
-        </p:txBody>
-      </p:sp>
-      <p:sp>
-        <p:nvSpPr>
-          <p:cNvPr id="6" name="Text 4"/>
-          <p:cNvSpPr/>
-          <p:nvPr/>
-        </p:nvSpPr>
-        <p:spPr>
-          <a:xfrm>
-            <a:off x="634901" y="1462534"/>
-            <a:ext cx="8102798" cy="1988344"/>
-          </a:xfrm>
-          <a:prstGeom prst="rect">
-            <a:avLst/>
-          </a:prstGeom>
-          <a:noFill/>
-          <a:ln/>
-        </p:spPr>
-        <p:txBody>
-          <a:bodyPr wrap="square" lIns="0" tIns="0" rIns="0" bIns="0" rtlCol="0" anchor="t"/>
-          <a:lstStyle/>
-          <a:p>
-            <a:pPr algn="l" marL="342900" indent="-342900">
-              <a:lnSpc>
-                <a:spcPts val="1620"/>
-              </a:lnSpc>
-              <a:spcAft>
-                <a:spcPts val="300"/>
-              </a:spcAft>
-              <a:buSzPct val="100000"/>
-              <a:buChar char="•"/>
-            </a:pPr>
-            <a:r>
-              <a:rPr lang="en-US" sz="1200" dirty="0">
-                <a:solidFill>
-                  <a:srgbClr val="1C2833"/>
-                </a:solidFill>
-                <a:latin typeface="Arial" pitchFamily="34" charset="0"/>
-                <a:ea typeface="Arial" pitchFamily="34" charset="-122"/>
-                <a:cs typeface="Arial" pitchFamily="34" charset="-120"/>
-              </a:rPr>
-              <a:t>Sketch of the herb (leaf, root, or seed — whichever is most identifying)</a:t>
-            </a:r>
-            <a:endParaRPr lang="en-US" sz="1200" dirty="0"/>
-          </a:p>
-          <a:p>
-            <a:pPr algn="l" marL="342900" indent="-342900">
-              <a:lnSpc>
-                <a:spcPts val="1620"/>
-              </a:lnSpc>
-              <a:spcAft>
-                <a:spcPts val="300"/>
-              </a:spcAft>
-              <a:buSzPct val="100000"/>
-              <a:buChar char="•"/>
-            </a:pPr>
-            <a:r>
-              <a:rPr lang="en-US" sz="1200" b="1" dirty="0">
-                <a:solidFill>
-                  <a:srgbClr val="1C2833"/>
-                </a:solidFill>
-                <a:latin typeface="Arial" pitchFamily="34" charset="0"/>
-                <a:ea typeface="Arial" pitchFamily="34" charset="-122"/>
-                <a:cs typeface="Arial" pitchFamily="34" charset="-120"/>
-              </a:rPr>
-              <a:t>Sanskrit name</a:t>
-            </a:r>
-            <a:pPr algn="l" indent="0" marL="0">
-              <a:lnSpc>
-                <a:spcPts val="1620"/>
-              </a:lnSpc>
-              <a:spcAft>
-                <a:spcPts val="300"/>
-              </a:spcAft>
-              <a:buNone/>
-            </a:pPr>
-            <a:r>
-              <a:rPr lang="en-US" sz="1200" dirty="0">
-                <a:solidFill>
-                  <a:srgbClr val="1C2833"/>
-                </a:solidFill>
-                <a:latin typeface="Arial" pitchFamily="34" charset="0"/>
-                <a:ea typeface="Arial" pitchFamily="34" charset="-122"/>
-                <a:cs typeface="Arial" pitchFamily="34" charset="-120"/>
-              </a:rPr>
-              <a:t> in IAST</a:t>
-            </a:r>
-            <a:endParaRPr lang="en-US" sz="1200" dirty="0"/>
-          </a:p>
-          <a:p>
-            <a:pPr algn="l" marL="342900" indent="-342900">
-              <a:lnSpc>
-                <a:spcPts val="1620"/>
-              </a:lnSpc>
-              <a:spcAft>
-                <a:spcPts val="300"/>
-              </a:spcAft>
-              <a:buSzPct val="100000"/>
-              <a:buChar char="•"/>
-            </a:pPr>
-            <a:r>
-              <a:rPr lang="en-US" sz="1200" b="1" dirty="0">
-                <a:solidFill>
-                  <a:srgbClr val="1C2833"/>
-                </a:solidFill>
-                <a:latin typeface="Arial" pitchFamily="34" charset="0"/>
-                <a:ea typeface="Arial" pitchFamily="34" charset="-122"/>
-                <a:cs typeface="Arial" pitchFamily="34" charset="-120"/>
-              </a:rPr>
-              <a:t>English / common name</a:t>
-            </a:r>
-            <a:endParaRPr lang="en-US" sz="1200" dirty="0"/>
-          </a:p>
-          <a:p>
-            <a:pPr algn="l" marL="342900" indent="-342900">
-              <a:lnSpc>
-                <a:spcPts val="1620"/>
-              </a:lnSpc>
-              <a:spcAft>
-                <a:spcPts val="300"/>
-              </a:spcAft>
-              <a:buSzPct val="100000"/>
-              <a:buChar char="•"/>
-            </a:pPr>
-            <a:r>
-              <a:rPr lang="en-US" sz="1200" b="1" dirty="0">
-                <a:solidFill>
-                  <a:srgbClr val="1C2833"/>
-                </a:solidFill>
-                <a:latin typeface="Arial" pitchFamily="34" charset="0"/>
-                <a:ea typeface="Arial" pitchFamily="34" charset="-122"/>
-                <a:cs typeface="Arial" pitchFamily="34" charset="-120"/>
-              </a:rPr>
-              <a:t>Botanical name</a:t>
-            </a:r>
-            <a:pPr algn="l" indent="0" marL="0">
-              <a:lnSpc>
-                <a:spcPts val="1620"/>
-              </a:lnSpc>
-              <a:spcAft>
-                <a:spcPts val="300"/>
-              </a:spcAft>
-              <a:buNone/>
-            </a:pPr>
-            <a:r>
-              <a:rPr lang="en-US" sz="1200" dirty="0">
-                <a:solidFill>
-                  <a:srgbClr val="1C2833"/>
-                </a:solidFill>
-                <a:latin typeface="Arial" pitchFamily="34" charset="0"/>
-                <a:ea typeface="Arial" pitchFamily="34" charset="-122"/>
-                <a:cs typeface="Arial" pitchFamily="34" charset="-120"/>
-              </a:rPr>
-              <a:t> (italicised)</a:t>
-            </a:r>
-            <a:endParaRPr lang="en-US" sz="1200" dirty="0"/>
-          </a:p>
-          <a:p>
-            <a:pPr algn="l" marL="342900" indent="-342900">
-              <a:lnSpc>
-                <a:spcPts val="1620"/>
-              </a:lnSpc>
-              <a:spcAft>
-                <a:spcPts val="300"/>
-              </a:spcAft>
-              <a:buSzPct val="100000"/>
-              <a:buChar char="•"/>
-            </a:pPr>
-            <a:r>
-              <a:rPr lang="en-US" sz="1200" b="1" dirty="0">
-                <a:solidFill>
-                  <a:srgbClr val="1C2833"/>
-                </a:solidFill>
-                <a:latin typeface="Arial" pitchFamily="34" charset="0"/>
-                <a:ea typeface="Arial" pitchFamily="34" charset="-122"/>
-                <a:cs typeface="Arial" pitchFamily="34" charset="-120"/>
-              </a:rPr>
-              <a:t>Family</a:t>
-            </a:r>
-            <a:pPr algn="l" indent="0" marL="0">
-              <a:lnSpc>
-                <a:spcPts val="1620"/>
-              </a:lnSpc>
-              <a:spcAft>
-                <a:spcPts val="300"/>
-              </a:spcAft>
-              <a:buNone/>
-            </a:pPr>
-            <a:r>
-              <a:rPr lang="en-US" sz="1200" dirty="0">
-                <a:solidFill>
-                  <a:srgbClr val="1C2833"/>
-                </a:solidFill>
-                <a:latin typeface="Arial" pitchFamily="34" charset="0"/>
-                <a:ea typeface="Arial" pitchFamily="34" charset="-122"/>
-                <a:cs typeface="Arial" pitchFamily="34" charset="-120"/>
-              </a:rPr>
-              <a:t> (e.g. Lamiaceae, Apiaceae, Zingiberaceae)</a:t>
-            </a:r>
-            <a:endParaRPr lang="en-US" sz="1200" dirty="0"/>
-          </a:p>
-          <a:p>
-            <a:pPr algn="l" marL="342900" indent="-342900">
-              <a:lnSpc>
-                <a:spcPts val="1620"/>
-              </a:lnSpc>
-              <a:spcAft>
-                <a:spcPts val="300"/>
-              </a:spcAft>
-              <a:buSzPct val="100000"/>
-              <a:buChar char="•"/>
-            </a:pPr>
-            <a:r>
-              <a:rPr lang="en-US" sz="1200" b="1" dirty="0">
-                <a:solidFill>
-                  <a:srgbClr val="1C2833"/>
-                </a:solidFill>
-                <a:latin typeface="Arial" pitchFamily="34" charset="0"/>
-                <a:ea typeface="Arial" pitchFamily="34" charset="-122"/>
-                <a:cs typeface="Arial" pitchFamily="34" charset="-120"/>
-              </a:rPr>
-              <a:t>Three identifying features</a:t>
-            </a:r>
-            <a:pPr algn="l" indent="0" marL="0">
-              <a:lnSpc>
-                <a:spcPts val="1620"/>
-              </a:lnSpc>
-              <a:spcAft>
-                <a:spcPts val="300"/>
-              </a:spcAft>
-              <a:buNone/>
-            </a:pPr>
-            <a:r>
-              <a:rPr lang="en-US" sz="1200" dirty="0">
-                <a:solidFill>
-                  <a:srgbClr val="1C2833"/>
-                </a:solidFill>
-                <a:latin typeface="Arial" pitchFamily="34" charset="0"/>
-                <a:ea typeface="Arial" pitchFamily="34" charset="-122"/>
-                <a:cs typeface="Arial" pitchFamily="34" charset="-120"/>
-              </a:rPr>
-              <a:t> (smell, leaf shape, colour, etc.)</a:t>
-            </a:r>
-            <a:endParaRPr lang="en-US" sz="1200" dirty="0"/>
-          </a:p>
-          <a:p>
-            <a:pPr algn="l" marL="342900" indent="-342900">
-              <a:lnSpc>
-                <a:spcPts val="1620"/>
-              </a:lnSpc>
-              <a:spcAft>
-                <a:spcPts val="300"/>
-              </a:spcAft>
-              <a:buSzPct val="100000"/>
-              <a:buChar char="•"/>
-            </a:pPr>
-            <a:r>
-              <a:rPr lang="en-US" sz="1200" b="1" dirty="0">
-                <a:solidFill>
-                  <a:srgbClr val="1C2833"/>
-                </a:solidFill>
-                <a:latin typeface="Arial" pitchFamily="34" charset="0"/>
-                <a:ea typeface="Arial" pitchFamily="34" charset="-122"/>
-                <a:cs typeface="Arial" pitchFamily="34" charset="-120"/>
-              </a:rPr>
-              <a:t>Active compound</a:t>
-            </a:r>
-            <a:pPr algn="l" indent="0" marL="0">
-              <a:lnSpc>
-                <a:spcPts val="1620"/>
-              </a:lnSpc>
-              <a:spcAft>
-                <a:spcPts val="300"/>
-              </a:spcAft>
-              <a:buNone/>
-            </a:pPr>
-            <a:r>
-              <a:rPr lang="en-US" sz="1200" dirty="0">
-                <a:solidFill>
-                  <a:srgbClr val="1C2833"/>
-                </a:solidFill>
-                <a:latin typeface="Arial" pitchFamily="34" charset="0"/>
-                <a:ea typeface="Arial" pitchFamily="34" charset="-122"/>
-                <a:cs typeface="Arial" pitchFamily="34" charset="-120"/>
-              </a:rPr>
-              <a:t> (curcumin, eugenol, etc.)</a:t>
-            </a:r>
-            <a:endParaRPr lang="en-US" sz="1200" dirty="0"/>
-          </a:p>
-          <a:p>
-            <a:pPr algn="l" marL="342900" indent="-342900">
-              <a:lnSpc>
-                <a:spcPts val="1620"/>
-              </a:lnSpc>
-              <a:spcAft>
-                <a:spcPts val="300"/>
-              </a:spcAft>
-              <a:buSzPct val="100000"/>
-              <a:buChar char="•"/>
-            </a:pPr>
-            <a:r>
-              <a:rPr lang="en-US" sz="1200" b="1" dirty="0">
-                <a:solidFill>
-                  <a:srgbClr val="1C2833"/>
-                </a:solidFill>
-                <a:latin typeface="Arial" pitchFamily="34" charset="0"/>
-                <a:ea typeface="Arial" pitchFamily="34" charset="-122"/>
-                <a:cs typeface="Arial" pitchFamily="34" charset="-120"/>
-              </a:rPr>
-              <a:t>One traditional use + one safety note</a:t>
-            </a:r>
-            <a:endParaRPr lang="en-US" sz="1200" dirty="0"/>
-          </a:p>
-        </p:txBody>
-      </p:sp>
-      <p:sp>
-        <p:nvSpPr>
-          <p:cNvPr id="7" name="Text 5"/>
-          <p:cNvSpPr/>
-          <p:nvPr/>
-        </p:nvSpPr>
-        <p:spPr>
-          <a:xfrm>
-            <a:off x="406301" y="3539728"/>
-            <a:ext cx="8498026" cy="213271"/>
-          </a:xfrm>
-          <a:prstGeom prst="rect">
-            <a:avLst/>
-          </a:prstGeom>
-          <a:noFill/>
-          <a:ln/>
-        </p:spPr>
-        <p:txBody>
-          <a:bodyPr wrap="square" lIns="0" tIns="0" rIns="0" bIns="0" rtlCol="0" anchor="t"/>
-          <a:lstStyle/>
-          <a:p>
-            <a:pPr algn="l" indent="0" marL="0">
-              <a:lnSpc>
-                <a:spcPts val="1680"/>
-              </a:lnSpc>
-              <a:spcBef>
-                <a:spcPts val="300"/>
-              </a:spcBef>
-              <a:spcAft>
-                <a:spcPts val="300"/>
-              </a:spcAft>
-              <a:buNone/>
-            </a:pPr>
-            <a:r>
-              <a:rPr lang="en-US" sz="1200" dirty="0">
-                <a:solidFill>
-                  <a:srgbClr val="1C2833"/>
-                </a:solidFill>
-                <a:latin typeface="Arial" pitchFamily="34" charset="0"/>
-                <a:ea typeface="Arial" pitchFamily="34" charset="-122"/>
-                <a:cs typeface="Arial" pitchFamily="34" charset="-120"/>
-              </a:rPr>
-              <a:t>Show one finished card example (you can use yesterday's </a:t>
-            </a:r>
-            <a:pPr algn="l" indent="0" marL="0">
-              <a:lnSpc>
-                <a:spcPts val="1680"/>
-              </a:lnSpc>
-              <a:spcBef>
-                <a:spcPts val="300"/>
-              </a:spcBef>
-              <a:spcAft>
-                <a:spcPts val="300"/>
-              </a:spcAft>
-              <a:buNone/>
-            </a:pPr>
-            <a:r>
-              <a:rPr lang="en-US" sz="1200" i="1" dirty="0">
-                <a:solidFill>
-                  <a:srgbClr val="1C2833"/>
-                </a:solidFill>
-                <a:latin typeface="Arial" pitchFamily="34" charset="0"/>
-                <a:ea typeface="Arial" pitchFamily="34" charset="-122"/>
-                <a:cs typeface="Arial" pitchFamily="34" charset="-120"/>
-              </a:rPr>
-              <a:t>pudīnā</a:t>
-            </a:r>
-            <a:pPr algn="l" indent="0" marL="0">
-              <a:lnSpc>
-                <a:spcPts val="1680"/>
-              </a:lnSpc>
-              <a:spcBef>
-                <a:spcPts val="300"/>
-              </a:spcBef>
-              <a:spcAft>
-                <a:spcPts val="300"/>
-              </a:spcAft>
-              <a:buNone/>
-            </a:pPr>
-            <a:r>
-              <a:rPr lang="en-US" sz="1200" dirty="0">
-                <a:solidFill>
-                  <a:srgbClr val="1C2833"/>
-                </a:solidFill>
-                <a:latin typeface="Arial" pitchFamily="34" charset="0"/>
-                <a:ea typeface="Arial" pitchFamily="34" charset="-122"/>
-                <a:cs typeface="Arial" pitchFamily="34" charset="-120"/>
-              </a:rPr>
-              <a:t> card-template).</a:t>
-            </a:r>
-            <a:endParaRPr lang="en-US" sz="1200" dirty="0"/>
-          </a:p>
-        </p:txBody>
-      </p:sp>
-      <p:sp>
-        <p:nvSpPr>
-          <p:cNvPr id="8" name="Text 6"/>
           <p:cNvSpPr/>
           <p:nvPr/>
         </p:nvSpPr>
@@ -3942,7 +6045,7 @@
                 <a:ea typeface="Georgia" pitchFamily="34" charset="-122"/>
                 <a:cs typeface="Georgia" pitchFamily="34" charset="-120"/>
               </a:rPr>
-              <a:t>Core / activity (35 min)</a:t>
+              <a:t>Warm-up (5 min)</a:t>
             </a:r>
             <a:endParaRPr lang="en-US" sz="1800" dirty="0"/>
           </a:p>
@@ -3990,7 +6093,7 @@
                 <a:ea typeface="Arial" pitchFamily="34" charset="-122"/>
                 <a:cs typeface="Arial" pitchFamily="34" charset="-120"/>
               </a:rPr>
-              <a:t>Pairs work continuously. The teacher rotates and intervenes.</a:t>
+              <a:t>Read the project brief aloud (one student volunteers).</a:t>
             </a:r>
             <a:endParaRPr lang="en-US" sz="1200" dirty="0"/>
           </a:p>
@@ -3999,327 +6102,6 @@
       <p:sp>
         <p:nvSpPr>
           <p:cNvPr id="5" name="Text 3"/>
-          <p:cNvSpPr/>
-          <p:nvPr/>
-        </p:nvSpPr>
-        <p:spPr>
-          <a:xfrm>
-            <a:off x="406301" y="1160413"/>
-            <a:ext cx="8498026" cy="213271"/>
-          </a:xfrm>
-          <a:prstGeom prst="rect">
-            <a:avLst/>
-          </a:prstGeom>
-          <a:noFill/>
-          <a:ln/>
-        </p:spPr>
-        <p:txBody>
-          <a:bodyPr wrap="square" lIns="0" tIns="0" rIns="0" bIns="0" rtlCol="0" anchor="t"/>
-          <a:lstStyle/>
-          <a:p>
-            <a:pPr algn="l" indent="0" marL="0">
-              <a:lnSpc>
-                <a:spcPts val="1680"/>
-              </a:lnSpc>
-              <a:spcBef>
-                <a:spcPts val="300"/>
-              </a:spcBef>
-              <a:spcAft>
-                <a:spcPts val="300"/>
-              </a:spcAft>
-              <a:buNone/>
-            </a:pPr>
-            <a:r>
-              <a:rPr lang="en-US" sz="1200" b="1" dirty="0">
-                <a:solidFill>
-                  <a:srgbClr val="1C2833"/>
-                </a:solidFill>
-                <a:latin typeface="Arial" pitchFamily="34" charset="0"/>
-                <a:ea typeface="Arial" pitchFamily="34" charset="-122"/>
-                <a:cs typeface="Arial" pitchFamily="34" charset="-120"/>
-              </a:rPr>
-              <a:t>Pacing checkpoints — write on the board:</a:t>
-            </a:r>
-            <a:endParaRPr lang="en-US" sz="1200" dirty="0"/>
-          </a:p>
-        </p:txBody>
-      </p:sp>
-      <p:sp>
-        <p:nvSpPr>
-          <p:cNvPr id="6" name="Text 4"/>
-          <p:cNvSpPr/>
-          <p:nvPr/>
-        </p:nvSpPr>
-        <p:spPr>
-          <a:xfrm>
-            <a:off x="634901" y="1462534"/>
-            <a:ext cx="8102798" cy="769441"/>
-          </a:xfrm>
-          <a:prstGeom prst="rect">
-            <a:avLst/>
-          </a:prstGeom>
-          <a:noFill/>
-          <a:ln/>
-        </p:spPr>
-        <p:txBody>
-          <a:bodyPr wrap="square" lIns="0" tIns="0" rIns="0" bIns="0" rtlCol="0" anchor="t"/>
-          <a:lstStyle/>
-          <a:p>
-            <a:pPr algn="l" marL="342900" indent="-342900">
-              <a:lnSpc>
-                <a:spcPts val="1620"/>
-              </a:lnSpc>
-              <a:spcAft>
-                <a:spcPts val="300"/>
-              </a:spcAft>
-              <a:buSzPct val="100000"/>
-              <a:buChar char="•"/>
-            </a:pPr>
-            <a:r>
-              <a:rPr lang="en-US" sz="1200" b="1" dirty="0">
-                <a:solidFill>
-                  <a:srgbClr val="1C2833"/>
-                </a:solidFill>
-                <a:latin typeface="Arial" pitchFamily="34" charset="0"/>
-                <a:ea typeface="Arial" pitchFamily="34" charset="-122"/>
-                <a:cs typeface="Arial" pitchFamily="34" charset="-120"/>
-              </a:rPr>
-              <a:t>By minute 12 (out of 35):</a:t>
-            </a:r>
-            <a:pPr algn="l" indent="0" marL="0">
-              <a:lnSpc>
-                <a:spcPts val="1620"/>
-              </a:lnSpc>
-              <a:spcAft>
-                <a:spcPts val="300"/>
-              </a:spcAft>
-              <a:buNone/>
-            </a:pPr>
-            <a:r>
-              <a:rPr lang="en-US" sz="1200" dirty="0">
-                <a:solidFill>
-                  <a:srgbClr val="1C2833"/>
-                </a:solidFill>
-                <a:latin typeface="Arial" pitchFamily="34" charset="0"/>
-                <a:ea typeface="Arial" pitchFamily="34" charset="-122"/>
-                <a:cs typeface="Arial" pitchFamily="34" charset="-120"/>
-              </a:rPr>
-              <a:t> All six cards should have the sketch + Sanskrit + English name. (The fastest part.)</a:t>
-            </a:r>
-            <a:endParaRPr lang="en-US" sz="1200" dirty="0"/>
-          </a:p>
-          <a:p>
-            <a:pPr algn="l" marL="342900" indent="-342900">
-              <a:lnSpc>
-                <a:spcPts val="1620"/>
-              </a:lnSpc>
-              <a:spcAft>
-                <a:spcPts val="300"/>
-              </a:spcAft>
-              <a:buSzPct val="100000"/>
-              <a:buChar char="•"/>
-            </a:pPr>
-            <a:r>
-              <a:rPr lang="en-US" sz="1200" b="1" dirty="0">
-                <a:solidFill>
-                  <a:srgbClr val="1C2833"/>
-                </a:solidFill>
-                <a:latin typeface="Arial" pitchFamily="34" charset="0"/>
-                <a:ea typeface="Arial" pitchFamily="34" charset="-122"/>
-                <a:cs typeface="Arial" pitchFamily="34" charset="-120"/>
-              </a:rPr>
-              <a:t>By minute 25:</a:t>
-            </a:r>
-            <a:pPr algn="l" indent="0" marL="0">
-              <a:lnSpc>
-                <a:spcPts val="1620"/>
-              </a:lnSpc>
-              <a:spcAft>
-                <a:spcPts val="300"/>
-              </a:spcAft>
-              <a:buNone/>
-            </a:pPr>
-            <a:r>
-              <a:rPr lang="en-US" sz="1200" dirty="0">
-                <a:solidFill>
-                  <a:srgbClr val="1C2833"/>
-                </a:solidFill>
-                <a:latin typeface="Arial" pitchFamily="34" charset="0"/>
-                <a:ea typeface="Arial" pitchFamily="34" charset="-122"/>
-                <a:cs typeface="Arial" pitchFamily="34" charset="-120"/>
-              </a:rPr>
-              <a:t> All six cards should have the active compound and one traditional use.</a:t>
-            </a:r>
-            <a:endParaRPr lang="en-US" sz="1200" dirty="0"/>
-          </a:p>
-          <a:p>
-            <a:pPr algn="l" marL="342900" indent="-342900">
-              <a:lnSpc>
-                <a:spcPts val="1620"/>
-              </a:lnSpc>
-              <a:spcAft>
-                <a:spcPts val="300"/>
-              </a:spcAft>
-              <a:buSzPct val="100000"/>
-              <a:buChar char="•"/>
-            </a:pPr>
-            <a:r>
-              <a:rPr lang="en-US" sz="1200" b="1" dirty="0">
-                <a:solidFill>
-                  <a:srgbClr val="1C2833"/>
-                </a:solidFill>
-                <a:latin typeface="Arial" pitchFamily="34" charset="0"/>
-                <a:ea typeface="Arial" pitchFamily="34" charset="-122"/>
-                <a:cs typeface="Arial" pitchFamily="34" charset="-120"/>
-              </a:rPr>
-              <a:t>By minute 35:</a:t>
-            </a:r>
-            <a:pPr algn="l" indent="0" marL="0">
-              <a:lnSpc>
-                <a:spcPts val="1620"/>
-              </a:lnSpc>
-              <a:spcAft>
-                <a:spcPts val="300"/>
-              </a:spcAft>
-              <a:buNone/>
-            </a:pPr>
-            <a:r>
-              <a:rPr lang="en-US" sz="1200" dirty="0">
-                <a:solidFill>
-                  <a:srgbClr val="1C2833"/>
-                </a:solidFill>
-                <a:latin typeface="Arial" pitchFamily="34" charset="0"/>
-                <a:ea typeface="Arial" pitchFamily="34" charset="-122"/>
-                <a:cs typeface="Arial" pitchFamily="34" charset="-120"/>
-              </a:rPr>
-              <a:t> Each card should have the safety note + three identifying features.</a:t>
-            </a:r>
-            <a:endParaRPr lang="en-US" sz="1200" dirty="0"/>
-          </a:p>
-        </p:txBody>
-      </p:sp>
-      <p:sp>
-        <p:nvSpPr>
-          <p:cNvPr id="7" name="Text 5"/>
-          <p:cNvSpPr/>
-          <p:nvPr/>
-        </p:nvSpPr>
-        <p:spPr>
-          <a:xfrm>
-            <a:off x="406301" y="2320826"/>
-            <a:ext cx="8498026" cy="213271"/>
-          </a:xfrm>
-          <a:prstGeom prst="rect">
-            <a:avLst/>
-          </a:prstGeom>
-          <a:noFill/>
-          <a:ln/>
-        </p:spPr>
-        <p:txBody>
-          <a:bodyPr wrap="square" lIns="0" tIns="0" rIns="0" bIns="0" rtlCol="0" anchor="t"/>
-          <a:lstStyle/>
-          <a:p>
-            <a:pPr algn="l" indent="0" marL="0">
-              <a:lnSpc>
-                <a:spcPts val="1680"/>
-              </a:lnSpc>
-              <a:spcBef>
-                <a:spcPts val="300"/>
-              </a:spcBef>
-              <a:spcAft>
-                <a:spcPts val="300"/>
-              </a:spcAft>
-              <a:buNone/>
-            </a:pPr>
-            <a:r>
-              <a:rPr lang="en-US" sz="1200" dirty="0">
-                <a:solidFill>
-                  <a:srgbClr val="1C2833"/>
-                </a:solidFill>
-                <a:latin typeface="Arial" pitchFamily="34" charset="0"/>
-                <a:ea typeface="Arial" pitchFamily="34" charset="-122"/>
-                <a:cs typeface="Arial" pitchFamily="34" charset="-120"/>
-              </a:rPr>
-              <a:t>If a pair lags at any checkpoint, intervene specifically — don't let them spend 15 minutes perfecting one card.</a:t>
-            </a:r>
-            <a:endParaRPr lang="en-US" sz="1200" dirty="0"/>
-          </a:p>
-        </p:txBody>
-      </p:sp>
-      <p:sp>
-        <p:nvSpPr>
-          <p:cNvPr id="8" name="Text 6"/>
-          <p:cNvSpPr/>
-          <p:nvPr/>
-        </p:nvSpPr>
-        <p:spPr>
-          <a:xfrm>
-            <a:off x="406301" y="2610296"/>
-            <a:ext cx="8498026" cy="1066354"/>
-          </a:xfrm>
-          <a:prstGeom prst="rect">
-            <a:avLst/>
-          </a:prstGeom>
-          <a:noFill/>
-          <a:ln/>
-        </p:spPr>
-        <p:txBody>
-          <a:bodyPr wrap="square" lIns="0" tIns="0" rIns="0" bIns="0" rtlCol="0" anchor="t"/>
-          <a:lstStyle/>
-          <a:p>
-            <a:pPr algn="l" indent="0" marL="0">
-              <a:lnSpc>
-                <a:spcPts val="1680"/>
-              </a:lnSpc>
-              <a:spcBef>
-                <a:spcPts val="300"/>
-              </a:spcBef>
-              <a:spcAft>
-                <a:spcPts val="300"/>
-              </a:spcAft>
-              <a:buNone/>
-            </a:pPr>
-            <a:r>
-              <a:rPr lang="en-US" sz="1200" b="1" dirty="0">
-                <a:solidFill>
-                  <a:srgbClr val="1C2833"/>
-                </a:solidFill>
-                <a:latin typeface="Arial" pitchFamily="34" charset="0"/>
-                <a:ea typeface="Arial" pitchFamily="34" charset="-122"/>
-                <a:cs typeface="Arial" pitchFamily="34" charset="-120"/>
-              </a:rPr>
-              <a:t>Quality interventions to watch for:</a:t>
-            </a:r>
-            <a:pPr algn="l" indent="0" marL="0">
-              <a:lnSpc>
-                <a:spcPts val="1680"/>
-              </a:lnSpc>
-              <a:spcBef>
-                <a:spcPts val="300"/>
-              </a:spcBef>
-              <a:spcAft>
-                <a:spcPts val="300"/>
-              </a:spcAft>
-              <a:buNone/>
-            </a:pPr>
-            <a:r>
-              <a:rPr lang="en-US" sz="1200" dirty="0">
-                <a:solidFill>
-                  <a:srgbClr val="1C2833"/>
-                </a:solidFill>
-                <a:latin typeface="Arial" pitchFamily="34" charset="0"/>
-                <a:ea typeface="Arial" pitchFamily="34" charset="-122"/>
-                <a:cs typeface="Arial" pitchFamily="34" charset="-120"/>
-              </a:rPr>
-              <a:t> – Cards copying directly from a worksheet without engagement → ask "what's the most interesting thing about this herb? Add that to the card." – Cards with no safety note → "what's the dose question for this herb?" Write the answer. – Cards with grand health claims ("turmeric cures arthritis") → push back: "what does the evidence actually say?" – Cards missing the family → look it up together on the board (Lamiaceae for tulsi+mint, Apiaceae for ajwain, Zingiberaceae for ginger+turmeric, Meliaceae for neem).</a:t>
-            </a:r>
-            <a:endParaRPr lang="en-US" sz="1200" dirty="0"/>
-          </a:p>
-        </p:txBody>
-      </p:sp>
-      <p:sp>
-        <p:nvSpPr>
-          <p:cNvPr id="9" name="Text 7"/>
           <p:cNvSpPr/>
           <p:nvPr/>
         </p:nvSpPr>
@@ -4469,7 +6251,7 @@
                 <a:ea typeface="Georgia" pitchFamily="34" charset="-122"/>
                 <a:cs typeface="Georgia" pitchFamily="34" charset="-120"/>
               </a:rPr>
-              <a:t>Wrap-up (5 min)</a:t>
+              <a:t>Warm-up (5 min) (cont.)</a:t>
             </a:r>
             <a:endParaRPr lang="en-US" sz="1800" dirty="0"/>
           </a:p>
@@ -4484,7 +6266,7 @@
         <p:spPr>
           <a:xfrm>
             <a:off x="406301" y="870942"/>
-            <a:ext cx="8498026" cy="639812"/>
+            <a:ext cx="8498026" cy="213271"/>
           </a:xfrm>
           <a:prstGeom prst="rect">
             <a:avLst/>
@@ -4517,7 +6299,7 @@
                 <a:ea typeface="Arial" pitchFamily="34" charset="-122"/>
                 <a:cs typeface="Arial" pitchFamily="34" charset="-120"/>
               </a:rPr>
-              <a:t>– Each pair holds up one card they're proudest of. 10-second show + tell. – Collect cards in pair-folders for tomorrow. (Or have pairs take them home if they prefer to finalise overnight.) – Hand out the reflection slip — to complete tonight as homework: &gt; </a:t>
+              <a:t>Restate the </a:t>
             </a:r>
             <a:pPr algn="l" indent="0" marL="0">
               <a:lnSpc>
@@ -4532,15 +6314,38 @@
               <a:buNone/>
             </a:pPr>
             <a:r>
-              <a:rPr lang="en-US" sz="1200" i="1" dirty="0">
-                <a:solidFill>
-                  <a:srgbClr val="1C2833"/>
-                </a:solidFill>
-                <a:latin typeface="Arial" pitchFamily="34" charset="0"/>
-                <a:ea typeface="Arial" pitchFamily="34" charset="-122"/>
-                <a:cs typeface="Arial" pitchFamily="34" charset="-120"/>
-              </a:rPr>
-              <a:t>"What I set out to learn, what I actually learned, and one question I still have."</a:t>
+              <a:rPr lang="en-US" sz="1200" b="1" dirty="0">
+                <a:solidFill>
+                  <a:srgbClr val="1C2833"/>
+                </a:solidFill>
+                <a:latin typeface="Arial" pitchFamily="34" charset="0"/>
+                <a:ea typeface="Arial" pitchFamily="34" charset="-122"/>
+                <a:cs typeface="Arial" pitchFamily="34" charset="-120"/>
+              </a:rPr>
+              <a:t>eight required elements</a:t>
+            </a:r>
+            <a:pPr algn="l" indent="0" marL="0">
+              <a:lnSpc>
+                <a:spcPts val="1680"/>
+              </a:lnSpc>
+              <a:spcBef>
+                <a:spcPts val="300"/>
+              </a:spcBef>
+              <a:spcAft>
+                <a:spcPts val="300"/>
+              </a:spcAft>
+              <a:buNone/>
+            </a:pPr>
+            <a:r>
+              <a:rPr lang="en-US" sz="1200" dirty="0">
+                <a:solidFill>
+                  <a:srgbClr val="1C2833"/>
+                </a:solidFill>
+                <a:latin typeface="Arial" pitchFamily="34" charset="0"/>
+                <a:ea typeface="Arial" pitchFamily="34" charset="-122"/>
+                <a:cs typeface="Arial" pitchFamily="34" charset="-120"/>
+              </a:rPr>
+              <a:t> on each card:</a:t>
             </a:r>
             <a:endParaRPr lang="en-US" sz="1200" dirty="0"/>
           </a:p>
@@ -4549,6 +6354,320 @@
       <p:sp>
         <p:nvSpPr>
           <p:cNvPr id="5" name="Text 3"/>
+          <p:cNvSpPr/>
+          <p:nvPr/>
+        </p:nvSpPr>
+        <p:spPr>
+          <a:xfrm>
+            <a:off x="634901" y="1173063"/>
+            <a:ext cx="8102798" cy="1988344"/>
+          </a:xfrm>
+          <a:prstGeom prst="rect">
+            <a:avLst/>
+          </a:prstGeom>
+          <a:noFill/>
+          <a:ln/>
+        </p:spPr>
+        <p:txBody>
+          <a:bodyPr wrap="square" lIns="0" tIns="0" rIns="0" bIns="0" rtlCol="0" anchor="t"/>
+          <a:lstStyle/>
+          <a:p>
+            <a:pPr algn="l" marL="342900" indent="-342900">
+              <a:lnSpc>
+                <a:spcPts val="1620"/>
+              </a:lnSpc>
+              <a:spcAft>
+                <a:spcPts val="300"/>
+              </a:spcAft>
+              <a:buSzPct val="100000"/>
+              <a:buChar char="•"/>
+            </a:pPr>
+            <a:r>
+              <a:rPr lang="en-US" sz="1200" dirty="0">
+                <a:solidFill>
+                  <a:srgbClr val="1C2833"/>
+                </a:solidFill>
+                <a:latin typeface="Arial" pitchFamily="34" charset="0"/>
+                <a:ea typeface="Arial" pitchFamily="34" charset="-122"/>
+                <a:cs typeface="Arial" pitchFamily="34" charset="-120"/>
+              </a:rPr>
+              <a:t>Sketch of the herb (leaf, root, or seed — whichever is most identifying)</a:t>
+            </a:r>
+            <a:endParaRPr lang="en-US" sz="1200" dirty="0"/>
+          </a:p>
+          <a:p>
+            <a:pPr algn="l" marL="342900" indent="-342900">
+              <a:lnSpc>
+                <a:spcPts val="1620"/>
+              </a:lnSpc>
+              <a:spcAft>
+                <a:spcPts val="300"/>
+              </a:spcAft>
+              <a:buSzPct val="100000"/>
+              <a:buChar char="•"/>
+            </a:pPr>
+            <a:r>
+              <a:rPr lang="en-US" sz="1200" b="1" dirty="0">
+                <a:solidFill>
+                  <a:srgbClr val="1C2833"/>
+                </a:solidFill>
+                <a:latin typeface="Arial" pitchFamily="34" charset="0"/>
+                <a:ea typeface="Arial" pitchFamily="34" charset="-122"/>
+                <a:cs typeface="Arial" pitchFamily="34" charset="-120"/>
+              </a:rPr>
+              <a:t>Sanskrit name</a:t>
+            </a:r>
+            <a:pPr algn="l" indent="0" marL="0">
+              <a:lnSpc>
+                <a:spcPts val="1620"/>
+              </a:lnSpc>
+              <a:spcAft>
+                <a:spcPts val="300"/>
+              </a:spcAft>
+              <a:buNone/>
+            </a:pPr>
+            <a:r>
+              <a:rPr lang="en-US" sz="1200" dirty="0">
+                <a:solidFill>
+                  <a:srgbClr val="1C2833"/>
+                </a:solidFill>
+                <a:latin typeface="Arial" pitchFamily="34" charset="0"/>
+                <a:ea typeface="Arial" pitchFamily="34" charset="-122"/>
+                <a:cs typeface="Arial" pitchFamily="34" charset="-120"/>
+              </a:rPr>
+              <a:t> in IAST</a:t>
+            </a:r>
+            <a:endParaRPr lang="en-US" sz="1200" dirty="0"/>
+          </a:p>
+          <a:p>
+            <a:pPr algn="l" marL="342900" indent="-342900">
+              <a:lnSpc>
+                <a:spcPts val="1620"/>
+              </a:lnSpc>
+              <a:spcAft>
+                <a:spcPts val="300"/>
+              </a:spcAft>
+              <a:buSzPct val="100000"/>
+              <a:buChar char="•"/>
+            </a:pPr>
+            <a:r>
+              <a:rPr lang="en-US" sz="1200" b="1" dirty="0">
+                <a:solidFill>
+                  <a:srgbClr val="1C2833"/>
+                </a:solidFill>
+                <a:latin typeface="Arial" pitchFamily="34" charset="0"/>
+                <a:ea typeface="Arial" pitchFamily="34" charset="-122"/>
+                <a:cs typeface="Arial" pitchFamily="34" charset="-120"/>
+              </a:rPr>
+              <a:t>English / common name</a:t>
+            </a:r>
+            <a:endParaRPr lang="en-US" sz="1200" dirty="0"/>
+          </a:p>
+          <a:p>
+            <a:pPr algn="l" marL="342900" indent="-342900">
+              <a:lnSpc>
+                <a:spcPts val="1620"/>
+              </a:lnSpc>
+              <a:spcAft>
+                <a:spcPts val="300"/>
+              </a:spcAft>
+              <a:buSzPct val="100000"/>
+              <a:buChar char="•"/>
+            </a:pPr>
+            <a:r>
+              <a:rPr lang="en-US" sz="1200" b="1" dirty="0">
+                <a:solidFill>
+                  <a:srgbClr val="1C2833"/>
+                </a:solidFill>
+                <a:latin typeface="Arial" pitchFamily="34" charset="0"/>
+                <a:ea typeface="Arial" pitchFamily="34" charset="-122"/>
+                <a:cs typeface="Arial" pitchFamily="34" charset="-120"/>
+              </a:rPr>
+              <a:t>Botanical name</a:t>
+            </a:r>
+            <a:pPr algn="l" indent="0" marL="0">
+              <a:lnSpc>
+                <a:spcPts val="1620"/>
+              </a:lnSpc>
+              <a:spcAft>
+                <a:spcPts val="300"/>
+              </a:spcAft>
+              <a:buNone/>
+            </a:pPr>
+            <a:r>
+              <a:rPr lang="en-US" sz="1200" dirty="0">
+                <a:solidFill>
+                  <a:srgbClr val="1C2833"/>
+                </a:solidFill>
+                <a:latin typeface="Arial" pitchFamily="34" charset="0"/>
+                <a:ea typeface="Arial" pitchFamily="34" charset="-122"/>
+                <a:cs typeface="Arial" pitchFamily="34" charset="-120"/>
+              </a:rPr>
+              <a:t> (italicised)</a:t>
+            </a:r>
+            <a:endParaRPr lang="en-US" sz="1200" dirty="0"/>
+          </a:p>
+          <a:p>
+            <a:pPr algn="l" marL="342900" indent="-342900">
+              <a:lnSpc>
+                <a:spcPts val="1620"/>
+              </a:lnSpc>
+              <a:spcAft>
+                <a:spcPts val="300"/>
+              </a:spcAft>
+              <a:buSzPct val="100000"/>
+              <a:buChar char="•"/>
+            </a:pPr>
+            <a:r>
+              <a:rPr lang="en-US" sz="1200" b="1" dirty="0">
+                <a:solidFill>
+                  <a:srgbClr val="1C2833"/>
+                </a:solidFill>
+                <a:latin typeface="Arial" pitchFamily="34" charset="0"/>
+                <a:ea typeface="Arial" pitchFamily="34" charset="-122"/>
+                <a:cs typeface="Arial" pitchFamily="34" charset="-120"/>
+              </a:rPr>
+              <a:t>Family</a:t>
+            </a:r>
+            <a:pPr algn="l" indent="0" marL="0">
+              <a:lnSpc>
+                <a:spcPts val="1620"/>
+              </a:lnSpc>
+              <a:spcAft>
+                <a:spcPts val="300"/>
+              </a:spcAft>
+              <a:buNone/>
+            </a:pPr>
+            <a:r>
+              <a:rPr lang="en-US" sz="1200" dirty="0">
+                <a:solidFill>
+                  <a:srgbClr val="1C2833"/>
+                </a:solidFill>
+                <a:latin typeface="Arial" pitchFamily="34" charset="0"/>
+                <a:ea typeface="Arial" pitchFamily="34" charset="-122"/>
+                <a:cs typeface="Arial" pitchFamily="34" charset="-120"/>
+              </a:rPr>
+              <a:t> (e.g. Lamiaceae, Apiaceae, Zingiberaceae)</a:t>
+            </a:r>
+            <a:endParaRPr lang="en-US" sz="1200" dirty="0"/>
+          </a:p>
+          <a:p>
+            <a:pPr algn="l" marL="342900" indent="-342900">
+              <a:lnSpc>
+                <a:spcPts val="1620"/>
+              </a:lnSpc>
+              <a:spcAft>
+                <a:spcPts val="300"/>
+              </a:spcAft>
+              <a:buSzPct val="100000"/>
+              <a:buChar char="•"/>
+            </a:pPr>
+            <a:r>
+              <a:rPr lang="en-US" sz="1200" b="1" dirty="0">
+                <a:solidFill>
+                  <a:srgbClr val="1C2833"/>
+                </a:solidFill>
+                <a:latin typeface="Arial" pitchFamily="34" charset="0"/>
+                <a:ea typeface="Arial" pitchFamily="34" charset="-122"/>
+                <a:cs typeface="Arial" pitchFamily="34" charset="-120"/>
+              </a:rPr>
+              <a:t>Three identifying features</a:t>
+            </a:r>
+            <a:pPr algn="l" indent="0" marL="0">
+              <a:lnSpc>
+                <a:spcPts val="1620"/>
+              </a:lnSpc>
+              <a:spcAft>
+                <a:spcPts val="300"/>
+              </a:spcAft>
+              <a:buNone/>
+            </a:pPr>
+            <a:r>
+              <a:rPr lang="en-US" sz="1200" dirty="0">
+                <a:solidFill>
+                  <a:srgbClr val="1C2833"/>
+                </a:solidFill>
+                <a:latin typeface="Arial" pitchFamily="34" charset="0"/>
+                <a:ea typeface="Arial" pitchFamily="34" charset="-122"/>
+                <a:cs typeface="Arial" pitchFamily="34" charset="-120"/>
+              </a:rPr>
+              <a:t> (smell, leaf shape, colour, etc.)</a:t>
+            </a:r>
+            <a:endParaRPr lang="en-US" sz="1200" dirty="0"/>
+          </a:p>
+          <a:p>
+            <a:pPr algn="l" marL="342900" indent="-342900">
+              <a:lnSpc>
+                <a:spcPts val="1620"/>
+              </a:lnSpc>
+              <a:spcAft>
+                <a:spcPts val="300"/>
+              </a:spcAft>
+              <a:buSzPct val="100000"/>
+              <a:buChar char="•"/>
+            </a:pPr>
+            <a:r>
+              <a:rPr lang="en-US" sz="1200" b="1" dirty="0">
+                <a:solidFill>
+                  <a:srgbClr val="1C2833"/>
+                </a:solidFill>
+                <a:latin typeface="Arial" pitchFamily="34" charset="0"/>
+                <a:ea typeface="Arial" pitchFamily="34" charset="-122"/>
+                <a:cs typeface="Arial" pitchFamily="34" charset="-120"/>
+              </a:rPr>
+              <a:t>Active compound</a:t>
+            </a:r>
+            <a:pPr algn="l" indent="0" marL="0">
+              <a:lnSpc>
+                <a:spcPts val="1620"/>
+              </a:lnSpc>
+              <a:spcAft>
+                <a:spcPts val="300"/>
+              </a:spcAft>
+              <a:buNone/>
+            </a:pPr>
+            <a:r>
+              <a:rPr lang="en-US" sz="1200" dirty="0">
+                <a:solidFill>
+                  <a:srgbClr val="1C2833"/>
+                </a:solidFill>
+                <a:latin typeface="Arial" pitchFamily="34" charset="0"/>
+                <a:ea typeface="Arial" pitchFamily="34" charset="-122"/>
+                <a:cs typeface="Arial" pitchFamily="34" charset="-120"/>
+              </a:rPr>
+              <a:t> (curcumin, eugenol, etc.)</a:t>
+            </a:r>
+            <a:endParaRPr lang="en-US" sz="1200" dirty="0"/>
+          </a:p>
+          <a:p>
+            <a:pPr algn="l" marL="342900" indent="-342900">
+              <a:lnSpc>
+                <a:spcPts val="1620"/>
+              </a:lnSpc>
+              <a:spcAft>
+                <a:spcPts val="300"/>
+              </a:spcAft>
+              <a:buSzPct val="100000"/>
+              <a:buChar char="•"/>
+            </a:pPr>
+            <a:r>
+              <a:rPr lang="en-US" sz="1200" b="1" dirty="0">
+                <a:solidFill>
+                  <a:srgbClr val="1C2833"/>
+                </a:solidFill>
+                <a:latin typeface="Arial" pitchFamily="34" charset="0"/>
+                <a:ea typeface="Arial" pitchFamily="34" charset="-122"/>
+                <a:cs typeface="Arial" pitchFamily="34" charset="-120"/>
+              </a:rPr>
+              <a:t>One traditional use + one safety note</a:t>
+            </a:r>
+            <a:endParaRPr lang="en-US" sz="1200" dirty="0"/>
+          </a:p>
+        </p:txBody>
+      </p:sp>
+      <p:sp>
+        <p:nvSpPr>
+          <p:cNvPr id="6" name="Text 4"/>
           <p:cNvSpPr/>
           <p:nvPr/>
         </p:nvSpPr>
@@ -4698,7 +6817,7 @@
                 <a:ea typeface="Georgia" pitchFamily="34" charset="-122"/>
                 <a:cs typeface="Georgia" pitchFamily="34" charset="-120"/>
               </a:rPr>
-              <a:t>Student-facing content</a:t>
+              <a:t>Warm-up (5 min) (cont.)</a:t>
             </a:r>
             <a:endParaRPr lang="en-US" sz="1800" dirty="0"/>
           </a:p>
@@ -4712,61 +6831,8 @@
         </p:nvSpPr>
         <p:spPr>
           <a:xfrm>
-            <a:off x="406301" y="883593"/>
-            <a:ext cx="8331398" cy="1881187"/>
-          </a:xfrm>
-          <a:prstGeom prst="rect">
-            <a:avLst/>
-          </a:prstGeom>
-          <a:solidFill>
-            <a:srgbClr val="F4F8F9"/>
-          </a:solidFill>
-          <a:ln/>
-        </p:spPr>
-        <p:txBody>
-          <a:bodyPr wrap="square" rtlCol="0" anchor="ctr"/>
-          <a:lstStyle/>
-          <a:p>
-            <a:pPr indent="0" marL="0">
-              <a:buNone/>
-            </a:pPr>
-            <a:endParaRPr lang="en-US" dirty="0"/>
-          </a:p>
-        </p:txBody>
-      </p:sp>
-      <p:sp>
-        <p:nvSpPr>
-          <p:cNvPr id="5" name="Shape 3"/>
-          <p:cNvSpPr/>
-          <p:nvPr/>
-        </p:nvSpPr>
-        <p:spPr>
-          <a:xfrm>
-            <a:off x="434876" y="883593"/>
-            <a:ext cx="0" cy="1881187"/>
-          </a:xfrm>
-          <a:prstGeom prst="line">
-            <a:avLst/>
-          </a:prstGeom>
-          <a:noFill/>
-          <a:ln w="57150">
-            <a:solidFill>
-              <a:srgbClr val="FE4447"/>
-            </a:solidFill>
-            <a:prstDash val="solid"/>
-          </a:ln>
-        </p:spPr>
-      </p:sp>
-      <p:sp>
-        <p:nvSpPr>
-          <p:cNvPr id="6" name="Text 4"/>
-          <p:cNvSpPr/>
-          <p:nvPr/>
-        </p:nvSpPr>
-        <p:spPr>
-          <a:xfrm>
-            <a:off x="692051" y="1074093"/>
-            <a:ext cx="7973389" cy="230981"/>
+            <a:off x="406301" y="870942"/>
+            <a:ext cx="8498026" cy="213271"/>
           </a:xfrm>
           <a:prstGeom prst="rect">
             <a:avLst/>
@@ -4780,7 +6846,7 @@
           <a:p>
             <a:pPr algn="l" indent="0" marL="0">
               <a:lnSpc>
-                <a:spcPts val="1820"/>
+                <a:spcPts val="1680"/>
               </a:lnSpc>
               <a:spcBef>
                 <a:spcPts val="300"/>
@@ -4791,44 +6857,19 @@
               <a:buNone/>
             </a:pPr>
             <a:r>
-              <a:rPr lang="en-US" sz="1300" b="1" i="1" dirty="0">
-                <a:solidFill>
-                  <a:srgbClr val="1C2833"/>
-                </a:solidFill>
-                <a:latin typeface="Georgia" pitchFamily="34" charset="0"/>
-                <a:ea typeface="Georgia" pitchFamily="34" charset="-122"/>
-                <a:cs typeface="Georgia" pitchFamily="34" charset="-120"/>
-              </a:rPr>
-              <a:t>Today: build your 6-card herb deck.</a:t>
-            </a:r>
-            <a:endParaRPr lang="en-US" sz="1300" dirty="0"/>
-          </a:p>
-        </p:txBody>
-      </p:sp>
-      <p:sp>
-        <p:nvSpPr>
-          <p:cNvPr id="7" name="Text 5"/>
-          <p:cNvSpPr/>
-          <p:nvPr/>
-        </p:nvSpPr>
-        <p:spPr>
-          <a:xfrm>
-            <a:off x="692051" y="1343174"/>
-            <a:ext cx="7973389" cy="461963"/>
-          </a:xfrm>
-          <a:prstGeom prst="rect">
-            <a:avLst/>
-          </a:prstGeom>
-          <a:noFill/>
-          <a:ln/>
-        </p:spPr>
-        <p:txBody>
-          <a:bodyPr wrap="square" lIns="0" tIns="0" rIns="0" bIns="0" rtlCol="0" anchor="t"/>
-          <a:lstStyle/>
-          <a:p>
-            <a:pPr algn="l" indent="0" marL="0">
-              <a:lnSpc>
-                <a:spcPts val="1820"/>
+              <a:rPr lang="en-US" sz="1200" dirty="0">
+                <a:solidFill>
+                  <a:srgbClr val="1C2833"/>
+                </a:solidFill>
+                <a:latin typeface="Arial" pitchFamily="34" charset="0"/>
+                <a:ea typeface="Arial" pitchFamily="34" charset="-122"/>
+                <a:cs typeface="Arial" pitchFamily="34" charset="-120"/>
+              </a:rPr>
+              <a:t>Show one finished card example (you can use yesterday's </a:t>
+            </a:r>
+            <a:pPr algn="l" indent="0" marL="0">
+              <a:lnSpc>
+                <a:spcPts val="1680"/>
               </a:lnSpc>
               <a:spcBef>
                 <a:spcPts val="300"/>
@@ -4839,44 +6880,19 @@
               <a:buNone/>
             </a:pPr>
             <a:r>
-              <a:rPr lang="en-US" sz="1300" i="1" dirty="0">
-                <a:solidFill>
-                  <a:srgbClr val="1C2833"/>
-                </a:solidFill>
-                <a:latin typeface="Georgia" pitchFamily="34" charset="0"/>
-                <a:ea typeface="Georgia" pitchFamily="34" charset="-122"/>
-                <a:cs typeface="Georgia" pitchFamily="34" charset="-120"/>
-              </a:rPr>
-              <a:t>Each card has eight things — sketch, Sanskrit name, English name, botanical name, family, three identifying features, active compound, and one traditional use + one safety note.</a:t>
-            </a:r>
-            <a:endParaRPr lang="en-US" sz="1300" dirty="0"/>
-          </a:p>
-        </p:txBody>
-      </p:sp>
-      <p:sp>
-        <p:nvSpPr>
-          <p:cNvPr id="8" name="Text 6"/>
-          <p:cNvSpPr/>
-          <p:nvPr/>
-        </p:nvSpPr>
-        <p:spPr>
-          <a:xfrm>
-            <a:off x="692051" y="1843236"/>
-            <a:ext cx="7973389" cy="230981"/>
-          </a:xfrm>
-          <a:prstGeom prst="rect">
-            <a:avLst/>
-          </a:prstGeom>
-          <a:noFill/>
-          <a:ln/>
-        </p:spPr>
-        <p:txBody>
-          <a:bodyPr wrap="square" lIns="0" tIns="0" rIns="0" bIns="0" rtlCol="0" anchor="t"/>
-          <a:lstStyle/>
-          <a:p>
-            <a:pPr algn="l" indent="0" marL="0">
-              <a:lnSpc>
-                <a:spcPts val="1820"/>
+              <a:rPr lang="en-US" sz="1200" i="1" dirty="0">
+                <a:solidFill>
+                  <a:srgbClr val="1C2833"/>
+                </a:solidFill>
+                <a:latin typeface="Arial" pitchFamily="34" charset="0"/>
+                <a:ea typeface="Arial" pitchFamily="34" charset="-122"/>
+                <a:cs typeface="Arial" pitchFamily="34" charset="-120"/>
+              </a:rPr>
+              <a:t>pudīnā</a:t>
+            </a:r>
+            <a:pPr algn="l" indent="0" marL="0">
+              <a:lnSpc>
+                <a:spcPts val="1680"/>
               </a:lnSpc>
               <a:spcBef>
                 <a:spcPts val="300"/>
@@ -4887,71 +6903,23 @@
               <a:buNone/>
             </a:pPr>
             <a:r>
-              <a:rPr lang="en-US" sz="1300" i="1" dirty="0">
-                <a:solidFill>
-                  <a:srgbClr val="1C2833"/>
-                </a:solidFill>
-                <a:latin typeface="Georgia" pitchFamily="34" charset="0"/>
-                <a:ea typeface="Georgia" pitchFamily="34" charset="-122"/>
-                <a:cs typeface="Georgia" pitchFamily="34" charset="-120"/>
-              </a:rPr>
-              <a:t>Quality over completeness — but all six cards must be drafted by end of class.</a:t>
-            </a:r>
-            <a:endParaRPr lang="en-US" sz="1300" dirty="0"/>
-          </a:p>
-        </p:txBody>
-      </p:sp>
-      <p:sp>
-        <p:nvSpPr>
-          <p:cNvPr id="9" name="Text 7"/>
-          <p:cNvSpPr/>
-          <p:nvPr/>
-        </p:nvSpPr>
-        <p:spPr>
-          <a:xfrm>
-            <a:off x="692051" y="2112318"/>
-            <a:ext cx="7973389" cy="461963"/>
-          </a:xfrm>
-          <a:prstGeom prst="rect">
-            <a:avLst/>
-          </a:prstGeom>
-          <a:noFill/>
-          <a:ln/>
-        </p:spPr>
-        <p:txBody>
-          <a:bodyPr wrap="square" lIns="0" tIns="0" rIns="0" bIns="0" rtlCol="0" anchor="t"/>
-          <a:lstStyle/>
-          <a:p>
-            <a:pPr algn="l" indent="0" marL="0">
-              <a:lnSpc>
-                <a:spcPts val="1820"/>
-              </a:lnSpc>
-              <a:spcBef>
-                <a:spcPts val="300"/>
-              </a:spcBef>
-              <a:spcAft>
-                <a:spcPts val="300"/>
-              </a:spcAft>
-              <a:buNone/>
-            </a:pPr>
-            <a:r>
-              <a:rPr lang="en-US" sz="1300" i="1" dirty="0">
-                <a:solidFill>
-                  <a:srgbClr val="1C2833"/>
-                </a:solidFill>
-                <a:latin typeface="Georgia" pitchFamily="34" charset="0"/>
-                <a:ea typeface="Georgia" pitchFamily="34" charset="-122"/>
-                <a:cs typeface="Georgia" pitchFamily="34" charset="-120"/>
-              </a:rPr>
-              <a:t>Use what you've already drawn and noted across Days 2–7. Your worksheets are your raw material; the cards are the polished version.</a:t>
-            </a:r>
-            <a:endParaRPr lang="en-US" sz="1300" dirty="0"/>
-          </a:p>
-        </p:txBody>
-      </p:sp>
-      <p:sp>
-        <p:nvSpPr>
-          <p:cNvPr id="10" name="Text 8"/>
+              <a:rPr lang="en-US" sz="1200" dirty="0">
+                <a:solidFill>
+                  <a:srgbClr val="1C2833"/>
+                </a:solidFill>
+                <a:latin typeface="Arial" pitchFamily="34" charset="0"/>
+                <a:ea typeface="Arial" pitchFamily="34" charset="-122"/>
+                <a:cs typeface="Arial" pitchFamily="34" charset="-120"/>
+              </a:rPr>
+              <a:t> card-template).</a:t>
+            </a:r>
+            <a:endParaRPr lang="en-US" sz="1200" dirty="0"/>
+          </a:p>
+        </p:txBody>
+      </p:sp>
+      <p:sp>
+        <p:nvSpPr>
+          <p:cNvPr id="5" name="Text 3"/>
           <p:cNvSpPr/>
           <p:nvPr/>
         </p:nvSpPr>
@@ -5101,7 +7069,7 @@
                 <a:ea typeface="Georgia" pitchFamily="34" charset="-122"/>
                 <a:cs typeface="Georgia" pitchFamily="34" charset="-120"/>
               </a:rPr>
-              <a:t>Homework</a:t>
+              <a:t>Core / activity (35 min)</a:t>
             </a:r>
             <a:endParaRPr lang="en-US" sz="1800" dirty="0"/>
           </a:p>
@@ -5116,7 +7084,7 @@
         <p:spPr>
           <a:xfrm>
             <a:off x="406301" y="870942"/>
-            <a:ext cx="8498026" cy="426541"/>
+            <a:ext cx="8498026" cy="213271"/>
           </a:xfrm>
           <a:prstGeom prst="rect">
             <a:avLst/>
@@ -5149,7 +7117,7 @@
                 <a:ea typeface="Arial" pitchFamily="34" charset="-122"/>
                 <a:cs typeface="Arial" pitchFamily="34" charset="-120"/>
               </a:rPr>
-              <a:t>– Finalise any card you didn't complete in class. – Complete the reflection slip. – Bring all six cards + reflection slip + pencils to Day 10.</a:t>
+              <a:t>Pairs work continuously. The teacher rotates and intervenes.</a:t>
             </a:r>
             <a:endParaRPr lang="en-US" sz="1200" dirty="0"/>
           </a:p>
@@ -5158,6 +7126,54 @@
       <p:sp>
         <p:nvSpPr>
           <p:cNvPr id="5" name="Text 3"/>
+          <p:cNvSpPr/>
+          <p:nvPr/>
+        </p:nvSpPr>
+        <p:spPr>
+          <a:xfrm>
+            <a:off x="406301" y="1160413"/>
+            <a:ext cx="8498026" cy="213271"/>
+          </a:xfrm>
+          <a:prstGeom prst="rect">
+            <a:avLst/>
+          </a:prstGeom>
+          <a:noFill/>
+          <a:ln/>
+        </p:spPr>
+        <p:txBody>
+          <a:bodyPr wrap="square" lIns="0" tIns="0" rIns="0" bIns="0" rtlCol="0" anchor="t"/>
+          <a:lstStyle/>
+          <a:p>
+            <a:pPr algn="l" indent="0" marL="0">
+              <a:lnSpc>
+                <a:spcPts val="1680"/>
+              </a:lnSpc>
+              <a:spcBef>
+                <a:spcPts val="300"/>
+              </a:spcBef>
+              <a:spcAft>
+                <a:spcPts val="300"/>
+              </a:spcAft>
+              <a:buNone/>
+            </a:pPr>
+            <a:r>
+              <a:rPr lang="en-US" sz="1200" b="1" dirty="0">
+                <a:solidFill>
+                  <a:srgbClr val="1C2833"/>
+                </a:solidFill>
+                <a:latin typeface="Arial" pitchFamily="34" charset="0"/>
+                <a:ea typeface="Arial" pitchFamily="34" charset="-122"/>
+                <a:cs typeface="Arial" pitchFamily="34" charset="-120"/>
+              </a:rPr>
+              <a:t>Pacing checkpoints — write on the board:</a:t>
+            </a:r>
+            <a:endParaRPr lang="en-US" sz="1200" dirty="0"/>
+          </a:p>
+        </p:txBody>
+      </p:sp>
+      <p:sp>
+        <p:nvSpPr>
+          <p:cNvPr id="6" name="Text 4"/>
           <p:cNvSpPr/>
           <p:nvPr/>
         </p:nvSpPr>
@@ -5307,7 +7323,7 @@
                 <a:ea typeface="Georgia" pitchFamily="34" charset="-122"/>
                 <a:cs typeface="Georgia" pitchFamily="34" charset="-120"/>
               </a:rPr>
-              <a:t>Differentiation</a:t>
+              <a:t>Core / activity (35 min) (cont.)</a:t>
             </a:r>
             <a:endParaRPr lang="en-US" sz="1800" dirty="0"/>
           </a:p>
@@ -5322,7 +7338,7 @@
         <p:spPr>
           <a:xfrm>
             <a:off x="634901" y="883593"/>
-            <a:ext cx="8102798" cy="937022"/>
+            <a:ext cx="8102798" cy="769441"/>
           </a:xfrm>
           <a:prstGeom prst="rect">
             <a:avLst/>
@@ -5353,7 +7369,7 @@
                 <a:ea typeface="Arial" pitchFamily="34" charset="-122"/>
                 <a:cs typeface="Arial" pitchFamily="34" charset="-120"/>
               </a:rPr>
-              <a:t>One tier up:</a:t>
+              <a:t>By minute 12 (out of 35):</a:t>
             </a:r>
             <a:pPr algn="l" indent="0" marL="0">
               <a:lnSpc>
@@ -5373,247 +7389,7 @@
                 <a:ea typeface="Arial" pitchFamily="34" charset="-122"/>
                 <a:cs typeface="Arial" pitchFamily="34" charset="-120"/>
               </a:rPr>
-              <a:t> Make a </a:t>
-            </a:r>
-            <a:pPr algn="l" indent="0" marL="0">
-              <a:lnSpc>
-                <a:spcPts val="1620"/>
-              </a:lnSpc>
-              <a:spcAft>
-                <a:spcPts val="300"/>
-              </a:spcAft>
-              <a:buNone/>
-            </a:pPr>
-            <a:r>
-              <a:rPr lang="en-US" sz="1200" b="1" dirty="0">
-                <a:solidFill>
-                  <a:srgbClr val="1C2833"/>
-                </a:solidFill>
-                <a:latin typeface="Arial" pitchFamily="34" charset="0"/>
-                <a:ea typeface="Arial" pitchFamily="34" charset="-122"/>
-                <a:cs typeface="Arial" pitchFamily="34" charset="-120"/>
-              </a:rPr>
-              <a:t>7th card</a:t>
-            </a:r>
-            <a:pPr algn="l" indent="0" marL="0">
-              <a:lnSpc>
-                <a:spcPts val="1620"/>
-              </a:lnSpc>
-              <a:spcAft>
-                <a:spcPts val="300"/>
-              </a:spcAft>
-              <a:buNone/>
-            </a:pPr>
-            <a:r>
-              <a:rPr lang="en-US" sz="1200" dirty="0">
-                <a:solidFill>
-                  <a:srgbClr val="1C2833"/>
-                </a:solidFill>
-                <a:latin typeface="Arial" pitchFamily="34" charset="0"/>
-                <a:ea typeface="Arial" pitchFamily="34" charset="-122"/>
-                <a:cs typeface="Arial" pitchFamily="34" charset="-120"/>
-              </a:rPr>
-              <a:t> for a herb of your choice — </a:t>
-            </a:r>
-            <a:pPr algn="l" indent="0" marL="0">
-              <a:lnSpc>
-                <a:spcPts val="1620"/>
-              </a:lnSpc>
-              <a:spcAft>
-                <a:spcPts val="300"/>
-              </a:spcAft>
-              <a:buNone/>
-            </a:pPr>
-            <a:r>
-              <a:rPr lang="en-US" sz="1200" i="1" dirty="0">
-                <a:solidFill>
-                  <a:srgbClr val="1C2833"/>
-                </a:solidFill>
-                <a:latin typeface="Arial" pitchFamily="34" charset="0"/>
-                <a:ea typeface="Arial" pitchFamily="34" charset="-122"/>
-                <a:cs typeface="Arial" pitchFamily="34" charset="-120"/>
-              </a:rPr>
-              <a:t>aśvagandhā</a:t>
-            </a:r>
-            <a:pPr algn="l" indent="0" marL="0">
-              <a:lnSpc>
-                <a:spcPts val="1620"/>
-              </a:lnSpc>
-              <a:spcAft>
-                <a:spcPts val="300"/>
-              </a:spcAft>
-              <a:buNone/>
-            </a:pPr>
-            <a:r>
-              <a:rPr lang="en-US" sz="1200" dirty="0">
-                <a:solidFill>
-                  <a:srgbClr val="1C2833"/>
-                </a:solidFill>
-                <a:latin typeface="Arial" pitchFamily="34" charset="0"/>
-                <a:ea typeface="Arial" pitchFamily="34" charset="-122"/>
-                <a:cs typeface="Arial" pitchFamily="34" charset="-120"/>
-              </a:rPr>
-              <a:t>, </a:t>
-            </a:r>
-            <a:pPr algn="l" indent="0" marL="0">
-              <a:lnSpc>
-                <a:spcPts val="1620"/>
-              </a:lnSpc>
-              <a:spcAft>
-                <a:spcPts val="300"/>
-              </a:spcAft>
-              <a:buNone/>
-            </a:pPr>
-            <a:r>
-              <a:rPr lang="en-US" sz="1200" i="1" dirty="0">
-                <a:solidFill>
-                  <a:srgbClr val="1C2833"/>
-                </a:solidFill>
-                <a:latin typeface="Arial" pitchFamily="34" charset="0"/>
-                <a:ea typeface="Arial" pitchFamily="34" charset="-122"/>
-                <a:cs typeface="Arial" pitchFamily="34" charset="-120"/>
-              </a:rPr>
-              <a:t>brāhmī</a:t>
-            </a:r>
-            <a:pPr algn="l" indent="0" marL="0">
-              <a:lnSpc>
-                <a:spcPts val="1620"/>
-              </a:lnSpc>
-              <a:spcAft>
-                <a:spcPts val="300"/>
-              </a:spcAft>
-              <a:buNone/>
-            </a:pPr>
-            <a:r>
-              <a:rPr lang="en-US" sz="1200" dirty="0">
-                <a:solidFill>
-                  <a:srgbClr val="1C2833"/>
-                </a:solidFill>
-                <a:latin typeface="Arial" pitchFamily="34" charset="0"/>
-                <a:ea typeface="Arial" pitchFamily="34" charset="-122"/>
-                <a:cs typeface="Arial" pitchFamily="34" charset="-120"/>
-              </a:rPr>
-              <a:t>, </a:t>
-            </a:r>
-            <a:pPr algn="l" indent="0" marL="0">
-              <a:lnSpc>
-                <a:spcPts val="1620"/>
-              </a:lnSpc>
-              <a:spcAft>
-                <a:spcPts val="300"/>
-              </a:spcAft>
-              <a:buNone/>
-            </a:pPr>
-            <a:r>
-              <a:rPr lang="en-US" sz="1200" i="1" dirty="0">
-                <a:solidFill>
-                  <a:srgbClr val="1C2833"/>
-                </a:solidFill>
-                <a:latin typeface="Arial" pitchFamily="34" charset="0"/>
-                <a:ea typeface="Arial" pitchFamily="34" charset="-122"/>
-                <a:cs typeface="Arial" pitchFamily="34" charset="-120"/>
-              </a:rPr>
-              <a:t>triphalā</a:t>
-            </a:r>
-            <a:pPr algn="l" indent="0" marL="0">
-              <a:lnSpc>
-                <a:spcPts val="1620"/>
-              </a:lnSpc>
-              <a:spcAft>
-                <a:spcPts val="300"/>
-              </a:spcAft>
-              <a:buNone/>
-            </a:pPr>
-            <a:r>
-              <a:rPr lang="en-US" sz="1200" dirty="0">
-                <a:solidFill>
-                  <a:srgbClr val="1C2833"/>
-                </a:solidFill>
-                <a:latin typeface="Arial" pitchFamily="34" charset="0"/>
-                <a:ea typeface="Arial" pitchFamily="34" charset="-122"/>
-                <a:cs typeface="Arial" pitchFamily="34" charset="-120"/>
-              </a:rPr>
-              <a:t>, </a:t>
-            </a:r>
-            <a:pPr algn="l" indent="0" marL="0">
-              <a:lnSpc>
-                <a:spcPts val="1620"/>
-              </a:lnSpc>
-              <a:spcAft>
-                <a:spcPts val="300"/>
-              </a:spcAft>
-              <a:buNone/>
-            </a:pPr>
-            <a:r>
-              <a:rPr lang="en-US" sz="1200" i="1" dirty="0">
-                <a:solidFill>
-                  <a:srgbClr val="1C2833"/>
-                </a:solidFill>
-                <a:latin typeface="Arial" pitchFamily="34" charset="0"/>
-                <a:ea typeface="Arial" pitchFamily="34" charset="-122"/>
-                <a:cs typeface="Arial" pitchFamily="34" charset="-120"/>
-              </a:rPr>
-              <a:t>kariveppilai</a:t>
-            </a:r>
-            <a:pPr algn="l" indent="0" marL="0">
-              <a:lnSpc>
-                <a:spcPts val="1620"/>
-              </a:lnSpc>
-              <a:spcAft>
-                <a:spcPts val="300"/>
-              </a:spcAft>
-              <a:buNone/>
-            </a:pPr>
-            <a:r>
-              <a:rPr lang="en-US" sz="1200" dirty="0">
-                <a:solidFill>
-                  <a:srgbClr val="1C2833"/>
-                </a:solidFill>
-                <a:latin typeface="Arial" pitchFamily="34" charset="0"/>
-                <a:ea typeface="Arial" pitchFamily="34" charset="-122"/>
-                <a:cs typeface="Arial" pitchFamily="34" charset="-120"/>
-              </a:rPr>
-              <a:t> (curry leaf), or </a:t>
-            </a:r>
-            <a:pPr algn="l" indent="0" marL="0">
-              <a:lnSpc>
-                <a:spcPts val="1620"/>
-              </a:lnSpc>
-              <a:spcAft>
-                <a:spcPts val="300"/>
-              </a:spcAft>
-              <a:buNone/>
-            </a:pPr>
-            <a:r>
-              <a:rPr lang="en-US" sz="1200" i="1" dirty="0">
-                <a:solidFill>
-                  <a:srgbClr val="1C2833"/>
-                </a:solidFill>
-                <a:latin typeface="Arial" pitchFamily="34" charset="0"/>
-                <a:ea typeface="Arial" pitchFamily="34" charset="-122"/>
-                <a:cs typeface="Arial" pitchFamily="34" charset="-120"/>
-              </a:rPr>
-              <a:t>dhānyaka</a:t>
-            </a:r>
-            <a:pPr algn="l" indent="0" marL="0">
-              <a:lnSpc>
-                <a:spcPts val="1620"/>
-              </a:lnSpc>
-              <a:spcAft>
-                <a:spcPts val="300"/>
-              </a:spcAft>
-              <a:buNone/>
-            </a:pPr>
-            <a:r>
-              <a:rPr lang="en-US" sz="1200" dirty="0">
-                <a:solidFill>
-                  <a:srgbClr val="1C2833"/>
-                </a:solidFill>
-                <a:latin typeface="Arial" pitchFamily="34" charset="0"/>
-                <a:ea typeface="Arial" pitchFamily="34" charset="-122"/>
-                <a:cs typeface="Arial" pitchFamily="34" charset="-120"/>
-              </a:rPr>
-              <a:t> (coriander). Apply the same eight-element template.</a:t>
+              <a:t> All six cards should have the sketch + Sanskrit + English name. (The fastest part.)</a:t>
             </a:r>
             <a:endParaRPr lang="en-US" sz="1200" dirty="0"/>
           </a:p>
@@ -5637,7 +7413,7 @@
                 <a:ea typeface="Arial" pitchFamily="34" charset="-122"/>
                 <a:cs typeface="Arial" pitchFamily="34" charset="-120"/>
               </a:rPr>
-              <a:t>One tier down:</a:t>
+              <a:t>By minute 25:</a:t>
             </a:r>
             <a:pPr algn="l" indent="0" marL="0">
               <a:lnSpc>
@@ -5657,7 +7433,51 @@
                 <a:ea typeface="Arial" pitchFamily="34" charset="-122"/>
                 <a:cs typeface="Arial" pitchFamily="34" charset="-120"/>
               </a:rPr>
-              <a:t> Make 4 cards (drop turmeric and ajwain if compressed) — but each must have all 8 elements. Quality over quantity.</a:t>
+              <a:t> All six cards should have the active compound and one traditional use.</a:t>
+            </a:r>
+            <a:endParaRPr lang="en-US" sz="1200" dirty="0"/>
+          </a:p>
+          <a:p>
+            <a:pPr algn="l" marL="342900" indent="-342900">
+              <a:lnSpc>
+                <a:spcPts val="1620"/>
+              </a:lnSpc>
+              <a:spcAft>
+                <a:spcPts val="300"/>
+              </a:spcAft>
+              <a:buSzPct val="100000"/>
+              <a:buChar char="•"/>
+            </a:pPr>
+            <a:r>
+              <a:rPr lang="en-US" sz="1200" b="1" dirty="0">
+                <a:solidFill>
+                  <a:srgbClr val="1C2833"/>
+                </a:solidFill>
+                <a:latin typeface="Arial" pitchFamily="34" charset="0"/>
+                <a:ea typeface="Arial" pitchFamily="34" charset="-122"/>
+                <a:cs typeface="Arial" pitchFamily="34" charset="-120"/>
+              </a:rPr>
+              <a:t>By minute 35:</a:t>
+            </a:r>
+            <a:pPr algn="l" indent="0" marL="0">
+              <a:lnSpc>
+                <a:spcPts val="1620"/>
+              </a:lnSpc>
+              <a:spcAft>
+                <a:spcPts val="300"/>
+              </a:spcAft>
+              <a:buNone/>
+            </a:pPr>
+            <a:r>
+              <a:rPr lang="en-US" sz="1200" dirty="0">
+                <a:solidFill>
+                  <a:srgbClr val="1C2833"/>
+                </a:solidFill>
+                <a:latin typeface="Arial" pitchFamily="34" charset="0"/>
+                <a:ea typeface="Arial" pitchFamily="34" charset="-122"/>
+                <a:cs typeface="Arial" pitchFamily="34" charset="-120"/>
+              </a:rPr>
+              <a:t> Each card should have the safety note + three identifying features.</a:t>
             </a:r>
             <a:endParaRPr lang="en-US" sz="1200" dirty="0"/>
           </a:p>
